--- a/TA3/Python Part 1.pptx
+++ b/TA3/Python Part 1.pptx
@@ -5,34 +5,33 @@
     <p:sldMasterId id="2147483661" r:id="rId4"/>
   </p:sldMasterIdLst>
   <p:sldIdLst>
-    <p:sldId id="256" r:id="rId5"/>
-    <p:sldId id="257" r:id="rId6"/>
-    <p:sldId id="261" r:id="rId7"/>
-    <p:sldId id="262" r:id="rId8"/>
-    <p:sldId id="263" r:id="rId9"/>
-    <p:sldId id="264" r:id="rId10"/>
-    <p:sldId id="265" r:id="rId11"/>
-    <p:sldId id="266" r:id="rId12"/>
-    <p:sldId id="454" r:id="rId13"/>
-    <p:sldId id="456" r:id="rId14"/>
-    <p:sldId id="457" r:id="rId15"/>
-    <p:sldId id="460" r:id="rId16"/>
-    <p:sldId id="462" r:id="rId17"/>
-    <p:sldId id="463" r:id="rId18"/>
-    <p:sldId id="464" r:id="rId19"/>
-    <p:sldId id="465" r:id="rId20"/>
-    <p:sldId id="466" r:id="rId21"/>
-    <p:sldId id="467" r:id="rId22"/>
-    <p:sldId id="468" r:id="rId23"/>
-    <p:sldId id="469" r:id="rId24"/>
-    <p:sldId id="471" r:id="rId25"/>
-    <p:sldId id="472" r:id="rId26"/>
-    <p:sldId id="473" r:id="rId27"/>
-    <p:sldId id="475" r:id="rId28"/>
-    <p:sldId id="476" r:id="rId29"/>
-    <p:sldId id="478" r:id="rId30"/>
-    <p:sldId id="479" r:id="rId31"/>
-    <p:sldId id="480" r:id="rId32"/>
+    <p:sldId id="257" r:id="rId5"/>
+    <p:sldId id="261" r:id="rId6"/>
+    <p:sldId id="262" r:id="rId7"/>
+    <p:sldId id="263" r:id="rId8"/>
+    <p:sldId id="264" r:id="rId9"/>
+    <p:sldId id="265" r:id="rId10"/>
+    <p:sldId id="266" r:id="rId11"/>
+    <p:sldId id="454" r:id="rId12"/>
+    <p:sldId id="456" r:id="rId13"/>
+    <p:sldId id="457" r:id="rId14"/>
+    <p:sldId id="460" r:id="rId15"/>
+    <p:sldId id="462" r:id="rId16"/>
+    <p:sldId id="463" r:id="rId17"/>
+    <p:sldId id="464" r:id="rId18"/>
+    <p:sldId id="465" r:id="rId19"/>
+    <p:sldId id="466" r:id="rId20"/>
+    <p:sldId id="467" r:id="rId21"/>
+    <p:sldId id="468" r:id="rId22"/>
+    <p:sldId id="469" r:id="rId23"/>
+    <p:sldId id="471" r:id="rId24"/>
+    <p:sldId id="472" r:id="rId25"/>
+    <p:sldId id="473" r:id="rId26"/>
+    <p:sldId id="475" r:id="rId27"/>
+    <p:sldId id="476" r:id="rId28"/>
+    <p:sldId id="478" r:id="rId29"/>
+    <p:sldId id="479" r:id="rId30"/>
+    <p:sldId id="480" r:id="rId31"/>
   </p:sldIdLst>
   <p:sldSz cx="12192000" cy="6858000"/>
   <p:notesSz cx="6858000" cy="9144000"/>
@@ -148,6 +147,27 @@
     </p:ext>
   </p:extLst>
 </p:presentation>
+</file>
+
+<file path=ppt/changesInfos/changesInfo1.xml><?xml version="1.0" encoding="utf-8"?>
+<pc:chgInfo xmlns:a="http://schemas.openxmlformats.org/drawingml/2006/main" xmlns:r="http://schemas.openxmlformats.org/officeDocument/2006/relationships" xmlns:ac="http://schemas.microsoft.com/office/drawing/2013/main/command" xmlns:pc="http://schemas.microsoft.com/office/powerpoint/2013/main/command">
+  <pc:docChgLst>
+    <pc:chgData name="משה עופר" userId="be54d6cb-761f-4aec-b214-5cfcb9fa6e02" providerId="ADAL" clId="{6EE5103F-674B-4988-B3CB-FF8F63A12E87}"/>
+    <pc:docChg chg="delSld">
+      <pc:chgData name="משה עופר" userId="be54d6cb-761f-4aec-b214-5cfcb9fa6e02" providerId="ADAL" clId="{6EE5103F-674B-4988-B3CB-FF8F63A12E87}" dt="2025-11-09T12:25:32.441" v="0" actId="47"/>
+      <pc:docMkLst>
+        <pc:docMk/>
+      </pc:docMkLst>
+      <pc:sldChg chg="del">
+        <pc:chgData name="משה עופר" userId="be54d6cb-761f-4aec-b214-5cfcb9fa6e02" providerId="ADAL" clId="{6EE5103F-674B-4988-B3CB-FF8F63A12E87}" dt="2025-11-09T12:25:32.441" v="0" actId="47"/>
+        <pc:sldMkLst>
+          <pc:docMk/>
+          <pc:sldMk cId="3437434795" sldId="256"/>
+        </pc:sldMkLst>
+      </pc:sldChg>
+    </pc:docChg>
+  </pc:docChgLst>
+</pc:chgInfo>
 </file>
 
 <file path=ppt/slideLayouts/slideLayout1.xml><?xml version="1.0" encoding="utf-8"?>
@@ -5857,10 +5877,10 @@
       </p:grpSpPr>
       <p:sp>
         <p:nvSpPr>
-          <p:cNvPr id="2" name="כותרת 1">
+          <p:cNvPr id="2" name="Title 1">
             <a:extLst>
               <a:ext uri="{FF2B5EF4-FFF2-40B4-BE49-F238E27FC236}">
-                <a16:creationId xmlns:a16="http://schemas.microsoft.com/office/drawing/2014/main" id="{1ED2C10C-888C-D4D0-B08B-FA007F8DF10F}"/>
+                <a16:creationId xmlns:a16="http://schemas.microsoft.com/office/drawing/2014/main" id="{A1C8CC72-8287-EE4D-8114-149296622EE0}"/>
               </a:ext>
             </a:extLst>
           </p:cNvPr>
@@ -5873,42 +5893,130 @@
         </p:nvSpPr>
         <p:spPr/>
         <p:txBody>
-          <a:bodyPr/>
-          <a:lstStyle/>
-          <a:p>
-            <a:endParaRPr lang="en-US"/>
-          </a:p>
-        </p:txBody>
-      </p:sp>
-      <p:sp>
-        <p:nvSpPr>
-          <p:cNvPr id="3" name="כותרת משנה 2">
+          <a:bodyPr>
+            <a:normAutofit/>
+          </a:bodyPr>
+          <a:lstStyle/>
+          <a:p>
+            <a:pPr rtl="1"/>
+            <a:r>
+              <a:rPr lang="he-IL" cap="none" dirty="0"/>
+              <a:t>תכנות מונחה עצמים</a:t>
+            </a:r>
+            <a:br>
+              <a:rPr lang="he-IL" cap="none" dirty="0"/>
+            </a:br>
+            <a:r>
+              <a:rPr lang="he-IL" cap="none" dirty="0" err="1"/>
+              <a:t>P</a:t>
+            </a:r>
+            <a:r>
+              <a:rPr lang="en-US" cap="none" dirty="0" err="1"/>
+              <a:t>ython</a:t>
+            </a:r>
+            <a:br>
+              <a:rPr lang="he-IL" cap="none" dirty="0"/>
+            </a:br>
+            <a:endParaRPr lang="en-US" cap="none" dirty="0"/>
+          </a:p>
+        </p:txBody>
+      </p:sp>
+      <p:pic>
+        <p:nvPicPr>
+          <p:cNvPr id="7" name="תמונה 6" descr="תמונה שמכילה טקסט, גופן, צילום מסך, לוגו&#10;&#10;התיאור נוצר באופן אוטומטי">
             <a:extLst>
               <a:ext uri="{FF2B5EF4-FFF2-40B4-BE49-F238E27FC236}">
-                <a16:creationId xmlns:a16="http://schemas.microsoft.com/office/drawing/2014/main" id="{598715EE-725D-6F52-6F04-047C5326AE2E}"/>
+                <a16:creationId xmlns:a16="http://schemas.microsoft.com/office/drawing/2014/main" id="{7584DAEF-9E4A-9406-FAC7-61510D269C1D}"/>
               </a:ext>
             </a:extLst>
           </p:cNvPr>
-          <p:cNvSpPr>
-            <a:spLocks noGrp="1"/>
-          </p:cNvSpPr>
-          <p:nvPr>
-            <p:ph type="subTitle" idx="1"/>
-          </p:nvPr>
-        </p:nvSpPr>
-        <p:spPr/>
-        <p:txBody>
-          <a:bodyPr/>
-          <a:lstStyle/>
-          <a:p>
-            <a:endParaRPr lang="en-US"/>
+          <p:cNvPicPr>
+            <a:picLocks noChangeAspect="1"/>
+          </p:cNvPicPr>
+          <p:nvPr/>
+        </p:nvPicPr>
+        <p:blipFill>
+          <a:blip r:embed="rId2">
+            <a:extLst>
+              <a:ext uri="{837473B0-CC2E-450A-ABE3-18F120FF3D39}">
+                <a1611:picAttrSrcUrl xmlns:a1611="http://schemas.microsoft.com/office/drawing/2016/11/main" r:id="rId3"/>
+              </a:ext>
+            </a:extLst>
+          </a:blip>
+          <a:stretch>
+            <a:fillRect/>
+          </a:stretch>
+        </p:blipFill>
+        <p:spPr>
+          <a:xfrm>
+            <a:off x="3301094" y="3429000"/>
+            <a:ext cx="5981700" cy="3143251"/>
+          </a:xfrm>
+          <a:prstGeom prst="rect">
+            <a:avLst/>
+          </a:prstGeom>
+        </p:spPr>
+      </p:pic>
+      <p:sp>
+        <p:nvSpPr>
+          <p:cNvPr id="8" name="תיבת טקסט 7">
+            <a:extLst>
+              <a:ext uri="{FF2B5EF4-FFF2-40B4-BE49-F238E27FC236}">
+                <a16:creationId xmlns:a16="http://schemas.microsoft.com/office/drawing/2014/main" id="{D1F5CD84-014C-097C-A389-D31906DC73C7}"/>
+              </a:ext>
+            </a:extLst>
+          </p:cNvPr>
+          <p:cNvSpPr txBox="1"/>
+          <p:nvPr/>
+        </p:nvSpPr>
+        <p:spPr>
+          <a:xfrm>
+            <a:off x="3301094" y="6572251"/>
+            <a:ext cx="5981700" cy="230832"/>
+          </a:xfrm>
+          <a:prstGeom prst="rect">
+            <a:avLst/>
+          </a:prstGeom>
+          <a:noFill/>
+        </p:spPr>
+        <p:txBody>
+          <a:bodyPr wrap="square" rtlCol="1">
+            <a:spAutoFit/>
+          </a:bodyPr>
+          <a:lstStyle/>
+          <a:p>
+            <a:r>
+              <a:rPr lang="he-IL" sz="900" dirty="0">
+                <a:hlinkClick r:id="rId3" tooltip="https://wsparrow.blogspot.com/2018/02/how-to-create-quiz-using-python.html"/>
+              </a:rPr>
+              <a:t>תמונה זו</a:t>
+            </a:r>
+            <a:r>
+              <a:rPr lang="he-IL" sz="900" dirty="0"/>
+              <a:t> מאת מחבר לא ידוע ניתן </a:t>
+            </a:r>
+            <a:r>
+              <a:rPr lang="he-IL" sz="900" dirty="0" err="1"/>
+              <a:t>ברשיון</a:t>
+            </a:r>
+            <a:r>
+              <a:rPr lang="he-IL" sz="900" dirty="0"/>
+              <a:t> במסגרת </a:t>
+            </a:r>
+            <a:r>
+              <a:rPr lang="he-IL" sz="900" dirty="0">
+                <a:hlinkClick r:id="rId4" tooltip="https://creativecommons.org/licenses/by-nc-sa/3.0/"/>
+              </a:rPr>
+              <a:t>CC BY-SA-NC</a:t>
+            </a:r>
+            <a:endParaRPr lang="he-IL" sz="900" dirty="0"/>
           </a:p>
         </p:txBody>
       </p:sp>
     </p:spTree>
     <p:extLst>
       <p:ext uri="{BB962C8B-B14F-4D97-AF65-F5344CB8AC3E}">
-        <p14:creationId xmlns:p14="http://schemas.microsoft.com/office/powerpoint/2010/main" val="3437434795"/>
+        <p14:creationId xmlns:p14="http://schemas.microsoft.com/office/powerpoint/2010/main" val="857098409"/>
       </p:ext>
     </p:extLst>
   </p:cSld>
@@ -5919,303 +6027,6 @@
 </file>
 
 <file path=ppt/slides/slide10.xml><?xml version="1.0" encoding="utf-8"?>
-<p:sld xmlns:a="http://schemas.openxmlformats.org/drawingml/2006/main" xmlns:r="http://schemas.openxmlformats.org/officeDocument/2006/relationships" xmlns:p="http://schemas.openxmlformats.org/presentationml/2006/main">
-  <p:cSld>
-    <p:spTree>
-      <p:nvGrpSpPr>
-        <p:cNvPr id="1" name=""/>
-        <p:cNvGrpSpPr/>
-        <p:nvPr/>
-      </p:nvGrpSpPr>
-      <p:grpSpPr>
-        <a:xfrm>
-          <a:off x="0" y="0"/>
-          <a:ext cx="0" cy="0"/>
-          <a:chOff x="0" y="0"/>
-          <a:chExt cx="0" cy="0"/>
-        </a:xfrm>
-      </p:grpSpPr>
-      <p:sp>
-        <p:nvSpPr>
-          <p:cNvPr id="2" name="object 2"/>
-          <p:cNvSpPr txBox="1"/>
-          <p:nvPr/>
-        </p:nvSpPr>
-        <p:spPr>
-          <a:xfrm>
-            <a:off x="647575" y="366698"/>
-            <a:ext cx="10210800" cy="505267"/>
-          </a:xfrm>
-          <a:prstGeom prst="rect">
-            <a:avLst/>
-          </a:prstGeom>
-        </p:spPr>
-        <p:txBody>
-          <a:bodyPr vert="horz" wrap="square" lIns="0" tIns="12700" rIns="0" bIns="0" rtlCol="0">
-            <a:spAutoFit/>
-          </a:bodyPr>
-          <a:lstStyle/>
-          <a:p>
-            <a:pPr marL="12700">
-              <a:spcBef>
-                <a:spcPts val="100"/>
-              </a:spcBef>
-            </a:pPr>
-            <a:r>
-              <a:rPr lang="fr-FR" sz="3200" dirty="0">
-                <a:latin typeface="Trebuchet MS"/>
-                <a:cs typeface="Trebuchet MS"/>
-              </a:rPr>
-              <a:t>Python Variables - </a:t>
-            </a:r>
-            <a:r>
-              <a:rPr lang="fr-FR" sz="3200" dirty="0" err="1">
-                <a:latin typeface="Trebuchet MS"/>
-                <a:cs typeface="Trebuchet MS"/>
-              </a:rPr>
-              <a:t>Assign</a:t>
-            </a:r>
-            <a:r>
-              <a:rPr lang="fr-FR" sz="3200" dirty="0">
-                <a:latin typeface="Trebuchet MS"/>
-                <a:cs typeface="Trebuchet MS"/>
-              </a:rPr>
-              <a:t> Multiple Values</a:t>
-            </a:r>
-            <a:endParaRPr lang="en-US" sz="3200" dirty="0">
-              <a:latin typeface="Trebuchet MS"/>
-              <a:cs typeface="Trebuchet MS"/>
-            </a:endParaRPr>
-          </a:p>
-        </p:txBody>
-      </p:sp>
-      <p:sp>
-        <p:nvSpPr>
-          <p:cNvPr id="6" name="object 3">
-            <a:extLst>
-              <a:ext uri="{FF2B5EF4-FFF2-40B4-BE49-F238E27FC236}">
-                <a16:creationId xmlns:a16="http://schemas.microsoft.com/office/drawing/2014/main" id="{504C54EB-F689-45AF-9B50-A537385B0172}"/>
-              </a:ext>
-            </a:extLst>
-          </p:cNvPr>
-          <p:cNvSpPr txBox="1"/>
-          <p:nvPr/>
-        </p:nvSpPr>
-        <p:spPr>
-          <a:xfrm>
-            <a:off x="828625" y="1045837"/>
-            <a:ext cx="8561705" cy="443711"/>
-          </a:xfrm>
-          <a:prstGeom prst="rect">
-            <a:avLst/>
-          </a:prstGeom>
-        </p:spPr>
-        <p:txBody>
-          <a:bodyPr vert="horz" wrap="square" lIns="0" tIns="12700" rIns="0" bIns="0" rtlCol="0">
-            <a:spAutoFit/>
-          </a:bodyPr>
-          <a:lstStyle/>
-          <a:p>
-            <a:pPr algn="l" fontAlgn="base"/>
-            <a:r>
-              <a:rPr lang="en-US" sz="1400" dirty="0"/>
-              <a:t>Many Values to Multiple Variables</a:t>
-            </a:r>
-          </a:p>
-          <a:p>
-            <a:pPr algn="l" fontAlgn="base"/>
-            <a:r>
-              <a:rPr lang="en-US" sz="1400" dirty="0"/>
-              <a:t>Python allows you to assign values to multiple variables in one line:</a:t>
-            </a:r>
-          </a:p>
-        </p:txBody>
-      </p:sp>
-      <p:sp>
-        <p:nvSpPr>
-          <p:cNvPr id="7" name="object 3">
-            <a:extLst>
-              <a:ext uri="{FF2B5EF4-FFF2-40B4-BE49-F238E27FC236}">
-                <a16:creationId xmlns:a16="http://schemas.microsoft.com/office/drawing/2014/main" id="{334405EB-ED1B-4B81-8CB4-CBBC6E8D925D}"/>
-              </a:ext>
-            </a:extLst>
-          </p:cNvPr>
-          <p:cNvSpPr txBox="1"/>
-          <p:nvPr/>
-        </p:nvSpPr>
-        <p:spPr>
-          <a:xfrm>
-            <a:off x="828626" y="2789078"/>
-            <a:ext cx="8561705" cy="443711"/>
-          </a:xfrm>
-          <a:prstGeom prst="rect">
-            <a:avLst/>
-          </a:prstGeom>
-        </p:spPr>
-        <p:txBody>
-          <a:bodyPr vert="horz" wrap="square" lIns="0" tIns="12700" rIns="0" bIns="0" rtlCol="0">
-            <a:spAutoFit/>
-          </a:bodyPr>
-          <a:lstStyle/>
-          <a:p>
-            <a:pPr algn="l" fontAlgn="base"/>
-            <a:r>
-              <a:rPr lang="en-US" sz="1400" dirty="0"/>
-              <a:t>One Value to Multiple Variables</a:t>
-            </a:r>
-          </a:p>
-          <a:p>
-            <a:pPr algn="l" fontAlgn="base"/>
-            <a:r>
-              <a:rPr lang="en-US" sz="1400" dirty="0"/>
-              <a:t>And you can assign the same value to multiple variables in one line:</a:t>
-            </a:r>
-          </a:p>
-        </p:txBody>
-      </p:sp>
-      <p:sp>
-        <p:nvSpPr>
-          <p:cNvPr id="8" name="object 3">
-            <a:extLst>
-              <a:ext uri="{FF2B5EF4-FFF2-40B4-BE49-F238E27FC236}">
-                <a16:creationId xmlns:a16="http://schemas.microsoft.com/office/drawing/2014/main" id="{BAB998D1-0355-4374-BE6C-58AB9395D3F0}"/>
-              </a:ext>
-            </a:extLst>
-          </p:cNvPr>
-          <p:cNvSpPr txBox="1"/>
-          <p:nvPr/>
-        </p:nvSpPr>
-        <p:spPr>
-          <a:xfrm>
-            <a:off x="828625" y="4674846"/>
-            <a:ext cx="8561705" cy="659155"/>
-          </a:xfrm>
-          <a:prstGeom prst="rect">
-            <a:avLst/>
-          </a:prstGeom>
-        </p:spPr>
-        <p:txBody>
-          <a:bodyPr vert="horz" wrap="square" lIns="0" tIns="12700" rIns="0" bIns="0" rtlCol="0">
-            <a:spAutoFit/>
-          </a:bodyPr>
-          <a:lstStyle/>
-          <a:p>
-            <a:pPr algn="l" fontAlgn="base"/>
-            <a:r>
-              <a:rPr lang="en-US" sz="1400" dirty="0"/>
-              <a:t>Unpack a Collection</a:t>
-            </a:r>
-          </a:p>
-          <a:p>
-            <a:pPr algn="l" fontAlgn="base"/>
-            <a:r>
-              <a:rPr lang="en-US" sz="1400" dirty="0"/>
-              <a:t>If you have a collection of values in a list, tuple etc. Python allows you extract the values into variables. This is called unpacking.</a:t>
-            </a:r>
-          </a:p>
-        </p:txBody>
-      </p:sp>
-      <p:pic>
-        <p:nvPicPr>
-          <p:cNvPr id="4" name="תמונה 3">
-            <a:extLst>
-              <a:ext uri="{FF2B5EF4-FFF2-40B4-BE49-F238E27FC236}">
-                <a16:creationId xmlns:a16="http://schemas.microsoft.com/office/drawing/2014/main" id="{4BCE7B6E-07DE-47F4-B6BC-8E5625338D6E}"/>
-              </a:ext>
-            </a:extLst>
-          </p:cNvPr>
-          <p:cNvPicPr>
-            <a:picLocks noChangeAspect="1"/>
-          </p:cNvPicPr>
-          <p:nvPr/>
-        </p:nvPicPr>
-        <p:blipFill rotWithShape="1">
-          <a:blip r:embed="rId2"/>
-          <a:srcRect b="50006"/>
-          <a:stretch/>
-        </p:blipFill>
-        <p:spPr>
-          <a:xfrm>
-            <a:off x="828626" y="1765201"/>
-            <a:ext cx="3781425" cy="690488"/>
-          </a:xfrm>
-          <a:prstGeom prst="rect">
-            <a:avLst/>
-          </a:prstGeom>
-        </p:spPr>
-      </p:pic>
-      <p:pic>
-        <p:nvPicPr>
-          <p:cNvPr id="10" name="תמונה 9">
-            <a:extLst>
-              <a:ext uri="{FF2B5EF4-FFF2-40B4-BE49-F238E27FC236}">
-                <a16:creationId xmlns:a16="http://schemas.microsoft.com/office/drawing/2014/main" id="{E392D451-5E10-4932-880F-1D24DDCC0A04}"/>
-              </a:ext>
-            </a:extLst>
-          </p:cNvPr>
-          <p:cNvPicPr>
-            <a:picLocks noChangeAspect="1"/>
-          </p:cNvPicPr>
-          <p:nvPr/>
-        </p:nvPicPr>
-        <p:blipFill rotWithShape="1">
-          <a:blip r:embed="rId3"/>
-          <a:srcRect b="53241"/>
-          <a:stretch/>
-        </p:blipFill>
-        <p:spPr>
-          <a:xfrm>
-            <a:off x="828625" y="3456408"/>
-            <a:ext cx="5629275" cy="659155"/>
-          </a:xfrm>
-          <a:prstGeom prst="rect">
-            <a:avLst/>
-          </a:prstGeom>
-        </p:spPr>
-      </p:pic>
-      <p:pic>
-        <p:nvPicPr>
-          <p:cNvPr id="12" name="תמונה 11">
-            <a:extLst>
-              <a:ext uri="{FF2B5EF4-FFF2-40B4-BE49-F238E27FC236}">
-                <a16:creationId xmlns:a16="http://schemas.microsoft.com/office/drawing/2014/main" id="{D8F5F94C-5992-426F-9ED3-5705A2824A95}"/>
-              </a:ext>
-            </a:extLst>
-          </p:cNvPr>
-          <p:cNvPicPr>
-            <a:picLocks noChangeAspect="1"/>
-          </p:cNvPicPr>
-          <p:nvPr/>
-        </p:nvPicPr>
-        <p:blipFill rotWithShape="1">
-          <a:blip r:embed="rId4"/>
-          <a:srcRect b="34756"/>
-          <a:stretch/>
-        </p:blipFill>
-        <p:spPr>
-          <a:xfrm>
-            <a:off x="828623" y="5451944"/>
-            <a:ext cx="3733800" cy="1211821"/>
-          </a:xfrm>
-          <a:prstGeom prst="rect">
-            <a:avLst/>
-          </a:prstGeom>
-        </p:spPr>
-      </p:pic>
-    </p:spTree>
-    <p:extLst>
-      <p:ext uri="{BB962C8B-B14F-4D97-AF65-F5344CB8AC3E}">
-        <p14:creationId xmlns:p14="http://schemas.microsoft.com/office/powerpoint/2010/main" val="613200342"/>
-      </p:ext>
-    </p:extLst>
-  </p:cSld>
-  <p:clrMapOvr>
-    <a:masterClrMapping/>
-  </p:clrMapOvr>
-</p:sld>
-</file>
-
-<file path=ppt/slides/slide11.xml><?xml version="1.0" encoding="utf-8"?>
 <p:sld xmlns:a="http://schemas.openxmlformats.org/drawingml/2006/main" xmlns:r="http://schemas.openxmlformats.org/officeDocument/2006/relationships" xmlns:p="http://schemas.openxmlformats.org/presentationml/2006/main">
   <p:cSld>
     <p:spTree>
@@ -6669,7 +6480,7 @@
 </p:sld>
 </file>
 
-<file path=ppt/slides/slide12.xml><?xml version="1.0" encoding="utf-8"?>
+<file path=ppt/slides/slide11.xml><?xml version="1.0" encoding="utf-8"?>
 <p:sld xmlns:a="http://schemas.openxmlformats.org/drawingml/2006/main" xmlns:r="http://schemas.openxmlformats.org/officeDocument/2006/relationships" xmlns:p="http://schemas.openxmlformats.org/presentationml/2006/main">
   <p:cSld>
     <p:spTree>
@@ -6822,6 +6633,151 @@
     <p:extLst>
       <p:ext uri="{BB962C8B-B14F-4D97-AF65-F5344CB8AC3E}">
         <p14:creationId xmlns:p14="http://schemas.microsoft.com/office/powerpoint/2010/main" val="578212685"/>
+      </p:ext>
+    </p:extLst>
+  </p:cSld>
+  <p:clrMapOvr>
+    <a:masterClrMapping/>
+  </p:clrMapOvr>
+</p:sld>
+</file>
+
+<file path=ppt/slides/slide12.xml><?xml version="1.0" encoding="utf-8"?>
+<p:sld xmlns:a="http://schemas.openxmlformats.org/drawingml/2006/main" xmlns:r="http://schemas.openxmlformats.org/officeDocument/2006/relationships" xmlns:p="http://schemas.openxmlformats.org/presentationml/2006/main">
+  <p:cSld>
+    <p:spTree>
+      <p:nvGrpSpPr>
+        <p:cNvPr id="1" name=""/>
+        <p:cNvGrpSpPr/>
+        <p:nvPr/>
+      </p:nvGrpSpPr>
+      <p:grpSpPr>
+        <a:xfrm>
+          <a:off x="0" y="0"/>
+          <a:ext cx="0" cy="0"/>
+          <a:chOff x="0" y="0"/>
+          <a:chExt cx="0" cy="0"/>
+        </a:xfrm>
+      </p:grpSpPr>
+      <p:sp>
+        <p:nvSpPr>
+          <p:cNvPr id="2" name="object 2"/>
+          <p:cNvSpPr txBox="1"/>
+          <p:nvPr/>
+        </p:nvSpPr>
+        <p:spPr>
+          <a:xfrm>
+            <a:off x="526952" y="368383"/>
+            <a:ext cx="10210800" cy="505267"/>
+          </a:xfrm>
+          <a:prstGeom prst="rect">
+            <a:avLst/>
+          </a:prstGeom>
+        </p:spPr>
+        <p:txBody>
+          <a:bodyPr vert="horz" wrap="square" lIns="0" tIns="12700" rIns="0" bIns="0" rtlCol="0">
+            <a:spAutoFit/>
+          </a:bodyPr>
+          <a:lstStyle/>
+          <a:p>
+            <a:pPr marL="12700">
+              <a:spcBef>
+                <a:spcPts val="100"/>
+              </a:spcBef>
+            </a:pPr>
+            <a:r>
+              <a:rPr lang="fr-FR" sz="3200" dirty="0">
+                <a:cs typeface="Trebuchet MS"/>
+              </a:rPr>
+              <a:t>Python Data Types </a:t>
+            </a:r>
+            <a:r>
+              <a:rPr lang="fr-FR" sz="3200" dirty="0" err="1">
+                <a:cs typeface="Trebuchet MS"/>
+              </a:rPr>
+              <a:t>Cont</a:t>
+            </a:r>
+            <a:r>
+              <a:rPr lang="fr-FR" sz="3200" dirty="0">
+                <a:cs typeface="Trebuchet MS"/>
+              </a:rPr>
+              <a:t>.</a:t>
+            </a:r>
+            <a:endParaRPr lang="en-US" sz="3200" dirty="0">
+              <a:cs typeface="Trebuchet MS"/>
+            </a:endParaRPr>
+          </a:p>
+        </p:txBody>
+      </p:sp>
+      <p:sp>
+        <p:nvSpPr>
+          <p:cNvPr id="6" name="object 3">
+            <a:extLst>
+              <a:ext uri="{FF2B5EF4-FFF2-40B4-BE49-F238E27FC236}">
+                <a16:creationId xmlns:a16="http://schemas.microsoft.com/office/drawing/2014/main" id="{504C54EB-F689-45AF-9B50-A537385B0172}"/>
+              </a:ext>
+            </a:extLst>
+          </p:cNvPr>
+          <p:cNvSpPr txBox="1"/>
+          <p:nvPr/>
+        </p:nvSpPr>
+        <p:spPr>
+          <a:xfrm>
+            <a:off x="609601" y="1186429"/>
+            <a:ext cx="8561705" cy="228268"/>
+          </a:xfrm>
+          <a:prstGeom prst="rect">
+            <a:avLst/>
+          </a:prstGeom>
+        </p:spPr>
+        <p:txBody>
+          <a:bodyPr vert="horz" wrap="square" lIns="0" tIns="12700" rIns="0" bIns="0" rtlCol="0">
+            <a:spAutoFit/>
+          </a:bodyPr>
+          <a:lstStyle/>
+          <a:p>
+            <a:pPr algn="l" fontAlgn="base"/>
+            <a:r>
+              <a:rPr lang="en-US" sz="1400" dirty="0"/>
+              <a:t>In Python, the data type is set when you assign a value to a variable:</a:t>
+            </a:r>
+          </a:p>
+        </p:txBody>
+      </p:sp>
+      <p:pic>
+        <p:nvPicPr>
+          <p:cNvPr id="5" name="תמונה 4">
+            <a:extLst>
+              <a:ext uri="{FF2B5EF4-FFF2-40B4-BE49-F238E27FC236}">
+                <a16:creationId xmlns:a16="http://schemas.microsoft.com/office/drawing/2014/main" id="{A5446708-29D8-4AF9-81BC-B9AFC2EA3D3F}"/>
+              </a:ext>
+            </a:extLst>
+          </p:cNvPr>
+          <p:cNvPicPr>
+            <a:picLocks noChangeAspect="1"/>
+          </p:cNvPicPr>
+          <p:nvPr/>
+        </p:nvPicPr>
+        <p:blipFill>
+          <a:blip r:embed="rId2"/>
+          <a:stretch>
+            <a:fillRect/>
+          </a:stretch>
+        </p:blipFill>
+        <p:spPr>
+          <a:xfrm>
+            <a:off x="609600" y="1727475"/>
+            <a:ext cx="9479944" cy="4460675"/>
+          </a:xfrm>
+          <a:prstGeom prst="rect">
+            <a:avLst/>
+          </a:prstGeom>
+        </p:spPr>
+      </p:pic>
+    </p:spTree>
+    <p:extLst>
+      <p:ext uri="{BB962C8B-B14F-4D97-AF65-F5344CB8AC3E}">
+        <p14:creationId xmlns:p14="http://schemas.microsoft.com/office/powerpoint/2010/main" val="4072388455"/>
       </p:ext>
     </p:extLst>
   </p:cSld>
@@ -6856,7 +6812,7 @@
         </p:nvSpPr>
         <p:spPr>
           <a:xfrm>
-            <a:off x="526952" y="368383"/>
+            <a:off x="836133" y="209611"/>
             <a:ext cx="10210800" cy="505267"/>
           </a:xfrm>
           <a:prstGeom prst="rect">
@@ -6876,23 +6832,20 @@
             </a:pPr>
             <a:r>
               <a:rPr lang="fr-FR" sz="3200" dirty="0">
+                <a:latin typeface="+mj-lt"/>
                 <a:cs typeface="Trebuchet MS"/>
               </a:rPr>
-              <a:t>Python Data Types </a:t>
+              <a:t>Random </a:t>
             </a:r>
             <a:r>
               <a:rPr lang="fr-FR" sz="3200" dirty="0" err="1">
+                <a:latin typeface="+mj-lt"/>
                 <a:cs typeface="Trebuchet MS"/>
               </a:rPr>
-              <a:t>Cont</a:t>
-            </a:r>
-            <a:r>
-              <a:rPr lang="fr-FR" sz="3200" dirty="0">
-                <a:cs typeface="Trebuchet MS"/>
-              </a:rPr>
-              <a:t>.</a:t>
+              <a:t>Number</a:t>
             </a:r>
             <a:endParaRPr lang="en-US" sz="3200" dirty="0">
+              <a:latin typeface="+mj-lt"/>
               <a:cs typeface="Trebuchet MS"/>
             </a:endParaRPr>
           </a:p>
@@ -6912,8 +6865,8 @@
         </p:nvSpPr>
         <p:spPr>
           <a:xfrm>
-            <a:off x="609601" y="1186429"/>
-            <a:ext cx="8561705" cy="228268"/>
+            <a:off x="836134" y="1272542"/>
+            <a:ext cx="8561705" cy="1674817"/>
           </a:xfrm>
           <a:prstGeom prst="rect">
             <a:avLst/>
@@ -6927,18 +6880,43 @@
           <a:p>
             <a:pPr algn="l" fontAlgn="base"/>
             <a:r>
-              <a:rPr lang="en-US" sz="1400" dirty="0"/>
-              <a:t>In Python, the data type is set when you assign a value to a variable:</a:t>
+              <a:rPr lang="en-US" dirty="0"/>
+              <a:t>Random Number</a:t>
+            </a:r>
+          </a:p>
+          <a:p>
+            <a:pPr algn="l" fontAlgn="base"/>
+            <a:r>
+              <a:rPr lang="en-US" dirty="0"/>
+              <a:t>Python does not have a random() function to make a random number, but Python has a built-in module called random that can be used to make random numbers:</a:t>
+            </a:r>
+          </a:p>
+          <a:p>
+            <a:pPr algn="l" fontAlgn="base"/>
+            <a:endParaRPr lang="en-US" dirty="0"/>
+          </a:p>
+          <a:p>
+            <a:pPr algn="l" fontAlgn="base"/>
+            <a:r>
+              <a:rPr lang="en-US" dirty="0"/>
+              <a:t>Example</a:t>
+            </a:r>
+          </a:p>
+          <a:p>
+            <a:pPr algn="l" fontAlgn="base"/>
+            <a:r>
+              <a:rPr lang="en-US" dirty="0"/>
+              <a:t>Import the random module, and display a random number between 1 and 9:</a:t>
             </a:r>
           </a:p>
         </p:txBody>
       </p:sp>
       <p:pic>
         <p:nvPicPr>
-          <p:cNvPr id="5" name="תמונה 4">
+          <p:cNvPr id="4" name="תמונה 3">
             <a:extLst>
               <a:ext uri="{FF2B5EF4-FFF2-40B4-BE49-F238E27FC236}">
-                <a16:creationId xmlns:a16="http://schemas.microsoft.com/office/drawing/2014/main" id="{A5446708-29D8-4AF9-81BC-B9AFC2EA3D3F}"/>
+                <a16:creationId xmlns:a16="http://schemas.microsoft.com/office/drawing/2014/main" id="{21188AC0-4178-4A78-96ED-F467EE5BDD10}"/>
               </a:ext>
             </a:extLst>
           </p:cNvPr>
@@ -6955,8 +6933,8 @@
         </p:blipFill>
         <p:spPr>
           <a:xfrm>
-            <a:off x="609600" y="1727475"/>
-            <a:ext cx="9479944" cy="4460675"/>
+            <a:off x="745905" y="4152130"/>
+            <a:ext cx="7281679" cy="1004759"/>
           </a:xfrm>
           <a:prstGeom prst="rect">
             <a:avLst/>
@@ -6966,7 +6944,7 @@
     </p:spTree>
     <p:extLst>
       <p:ext uri="{BB962C8B-B14F-4D97-AF65-F5344CB8AC3E}">
-        <p14:creationId xmlns:p14="http://schemas.microsoft.com/office/powerpoint/2010/main" val="4072388455"/>
+        <p14:creationId xmlns:p14="http://schemas.microsoft.com/office/powerpoint/2010/main" val="2227010354"/>
       </p:ext>
     </p:extLst>
   </p:cSld>
@@ -7001,7 +6979,7 @@
         </p:nvSpPr>
         <p:spPr>
           <a:xfrm>
-            <a:off x="836133" y="209611"/>
+            <a:off x="664112" y="347261"/>
             <a:ext cx="10210800" cy="505267"/>
           </a:xfrm>
           <a:prstGeom prst="rect">
@@ -7024,14 +7002,7 @@
                 <a:latin typeface="+mj-lt"/>
                 <a:cs typeface="Trebuchet MS"/>
               </a:rPr>
-              <a:t>Random </a:t>
-            </a:r>
-            <a:r>
-              <a:rPr lang="fr-FR" sz="3200" dirty="0" err="1">
-                <a:latin typeface="+mj-lt"/>
-                <a:cs typeface="Trebuchet MS"/>
-              </a:rPr>
-              <a:t>Number</a:t>
+              <a:t>Multiline Strings</a:t>
             </a:r>
             <a:endParaRPr lang="en-US" sz="3200" dirty="0">
               <a:latin typeface="+mj-lt"/>
@@ -7054,8 +7025,8 @@
         </p:nvSpPr>
         <p:spPr>
           <a:xfrm>
-            <a:off x="836134" y="1272542"/>
-            <a:ext cx="8561705" cy="1674817"/>
+            <a:off x="664113" y="1628980"/>
+            <a:ext cx="8561705" cy="289823"/>
           </a:xfrm>
           <a:prstGeom prst="rect">
             <a:avLst/>
@@ -7070,42 +7041,17 @@
             <a:pPr algn="l" fontAlgn="base"/>
             <a:r>
               <a:rPr lang="en-US" dirty="0"/>
-              <a:t>Random Number</a:t>
-            </a:r>
-          </a:p>
-          <a:p>
-            <a:pPr algn="l" fontAlgn="base"/>
-            <a:r>
-              <a:rPr lang="en-US" dirty="0"/>
-              <a:t>Python does not have a random() function to make a random number, but Python has a built-in module called random that can be used to make random numbers:</a:t>
-            </a:r>
-          </a:p>
-          <a:p>
-            <a:pPr algn="l" fontAlgn="base"/>
-            <a:endParaRPr lang="en-US" dirty="0"/>
-          </a:p>
-          <a:p>
-            <a:pPr algn="l" fontAlgn="base"/>
-            <a:r>
-              <a:rPr lang="en-US" dirty="0"/>
-              <a:t>Example</a:t>
-            </a:r>
-          </a:p>
-          <a:p>
-            <a:pPr algn="l" fontAlgn="base"/>
-            <a:r>
-              <a:rPr lang="en-US" dirty="0"/>
-              <a:t>Import the random module, and display a random number between 1 and 9:</a:t>
+              <a:t>You can assign a multiline string to a variable by using three quotes:</a:t>
             </a:r>
           </a:p>
         </p:txBody>
       </p:sp>
       <p:pic>
         <p:nvPicPr>
-          <p:cNvPr id="4" name="תמונה 3">
+          <p:cNvPr id="5" name="תמונה 4">
             <a:extLst>
               <a:ext uri="{FF2B5EF4-FFF2-40B4-BE49-F238E27FC236}">
-                <a16:creationId xmlns:a16="http://schemas.microsoft.com/office/drawing/2014/main" id="{21188AC0-4178-4A78-96ED-F467EE5BDD10}"/>
+                <a16:creationId xmlns:a16="http://schemas.microsoft.com/office/drawing/2014/main" id="{BE13FE40-8F0C-4C9B-B5E6-9ADBCA67C3BE}"/>
               </a:ext>
             </a:extLst>
           </p:cNvPr>
@@ -7122,8 +7068,37 @@
         </p:blipFill>
         <p:spPr>
           <a:xfrm>
-            <a:off x="745905" y="4152130"/>
-            <a:ext cx="7281679" cy="1004759"/>
+            <a:off x="357508" y="2343879"/>
+            <a:ext cx="4923581" cy="1909144"/>
+          </a:xfrm>
+          <a:prstGeom prst="rect">
+            <a:avLst/>
+          </a:prstGeom>
+        </p:spPr>
+      </p:pic>
+      <p:pic>
+        <p:nvPicPr>
+          <p:cNvPr id="8" name="תמונה 7">
+            <a:extLst>
+              <a:ext uri="{FF2B5EF4-FFF2-40B4-BE49-F238E27FC236}">
+                <a16:creationId xmlns:a16="http://schemas.microsoft.com/office/drawing/2014/main" id="{82122D81-624B-47D2-AF26-4F729DD97DF0}"/>
+              </a:ext>
+            </a:extLst>
+          </p:cNvPr>
+          <p:cNvPicPr>
+            <a:picLocks noChangeAspect="1"/>
+          </p:cNvPicPr>
+          <p:nvPr/>
+        </p:nvPicPr>
+        <p:blipFill rotWithShape="1">
+          <a:blip r:embed="rId3"/>
+          <a:srcRect r="7158"/>
+          <a:stretch/>
+        </p:blipFill>
+        <p:spPr>
+          <a:xfrm>
+            <a:off x="5865206" y="2352714"/>
+            <a:ext cx="4200525" cy="2190751"/>
           </a:xfrm>
           <a:prstGeom prst="rect">
             <a:avLst/>
@@ -7133,7 +7108,7 @@
     </p:spTree>
     <p:extLst>
       <p:ext uri="{BB962C8B-B14F-4D97-AF65-F5344CB8AC3E}">
-        <p14:creationId xmlns:p14="http://schemas.microsoft.com/office/powerpoint/2010/main" val="2227010354"/>
+        <p14:creationId xmlns:p14="http://schemas.microsoft.com/office/powerpoint/2010/main" val="3664646228"/>
       </p:ext>
     </p:extLst>
   </p:cSld>
@@ -7168,7 +7143,7 @@
         </p:nvSpPr>
         <p:spPr>
           <a:xfrm>
-            <a:off x="664112" y="347261"/>
+            <a:off x="778412" y="426611"/>
             <a:ext cx="10210800" cy="505267"/>
           </a:xfrm>
           <a:prstGeom prst="rect">
@@ -7191,7 +7166,14 @@
                 <a:latin typeface="+mj-lt"/>
                 <a:cs typeface="Trebuchet MS"/>
               </a:rPr>
-              <a:t>Multiline Strings</a:t>
+              <a:t>Strings are </a:t>
+            </a:r>
+            <a:r>
+              <a:rPr lang="fr-FR" sz="3200" dirty="0" err="1">
+                <a:latin typeface="+mj-lt"/>
+                <a:cs typeface="Trebuchet MS"/>
+              </a:rPr>
+              <a:t>Arrays</a:t>
             </a:r>
             <a:endParaRPr lang="en-US" sz="3200" dirty="0">
               <a:latin typeface="+mj-lt"/>
@@ -7214,8 +7196,8 @@
         </p:nvSpPr>
         <p:spPr>
           <a:xfrm>
-            <a:off x="664113" y="1628980"/>
-            <a:ext cx="8561705" cy="289823"/>
+            <a:off x="778413" y="1179042"/>
+            <a:ext cx="8561705" cy="1520929"/>
           </a:xfrm>
           <a:prstGeom prst="rect">
             <a:avLst/>
@@ -7229,18 +7211,48 @@
           <a:p>
             <a:pPr algn="l" fontAlgn="base"/>
             <a:r>
-              <a:rPr lang="en-US" dirty="0"/>
-              <a:t>You can assign a multiline string to a variable by using three quotes:</a:t>
+              <a:rPr lang="en-US" sz="1400" dirty="0"/>
+              <a:t>Like many other popular programming languages, strings in Python are arrays of bytes representing </a:t>
+            </a:r>
+            <a:r>
+              <a:rPr lang="en-US" sz="1400" dirty="0" err="1"/>
+              <a:t>unicode</a:t>
+            </a:r>
+            <a:r>
+              <a:rPr lang="en-US" sz="1400" dirty="0"/>
+              <a:t> characters.</a:t>
+            </a:r>
+          </a:p>
+          <a:p>
+            <a:pPr algn="l" fontAlgn="base"/>
+            <a:endParaRPr lang="en-US" sz="1400" dirty="0"/>
+          </a:p>
+          <a:p>
+            <a:pPr algn="l" fontAlgn="base"/>
+            <a:r>
+              <a:rPr lang="en-US" sz="1400" dirty="0"/>
+              <a:t>However, Python does not have a character data type, a single character is simply a string with a length of 1.</a:t>
+            </a:r>
+          </a:p>
+          <a:p>
+            <a:pPr algn="l" fontAlgn="base"/>
+            <a:endParaRPr lang="en-US" sz="1400" dirty="0"/>
+          </a:p>
+          <a:p>
+            <a:pPr algn="l" fontAlgn="base"/>
+            <a:r>
+              <a:rPr lang="en-US" sz="1400" dirty="0"/>
+              <a:t>Square brackets can be used to access elements of the string.</a:t>
             </a:r>
           </a:p>
         </p:txBody>
       </p:sp>
       <p:pic>
         <p:nvPicPr>
-          <p:cNvPr id="5" name="תמונה 4">
+          <p:cNvPr id="4" name="תמונה 3">
             <a:extLst>
               <a:ext uri="{FF2B5EF4-FFF2-40B4-BE49-F238E27FC236}">
-                <a16:creationId xmlns:a16="http://schemas.microsoft.com/office/drawing/2014/main" id="{BE13FE40-8F0C-4C9B-B5E6-9ADBCA67C3BE}"/>
+                <a16:creationId xmlns:a16="http://schemas.microsoft.com/office/drawing/2014/main" id="{75B500B3-1D2E-4CE4-9CA7-1598DBC66A0F}"/>
               </a:ext>
             </a:extLst>
           </p:cNvPr>
@@ -7257,20 +7269,62 @@
         </p:blipFill>
         <p:spPr>
           <a:xfrm>
-            <a:off x="357508" y="2343879"/>
-            <a:ext cx="4923581" cy="1909144"/>
+            <a:off x="778412" y="2737740"/>
+            <a:ext cx="6486525" cy="1314451"/>
           </a:xfrm>
           <a:prstGeom prst="rect">
             <a:avLst/>
           </a:prstGeom>
         </p:spPr>
       </p:pic>
+      <p:sp>
+        <p:nvSpPr>
+          <p:cNvPr id="9" name="object 3">
+            <a:extLst>
+              <a:ext uri="{FF2B5EF4-FFF2-40B4-BE49-F238E27FC236}">
+                <a16:creationId xmlns:a16="http://schemas.microsoft.com/office/drawing/2014/main" id="{F5C3D585-7BD8-4051-BEBD-72C19B1A630D}"/>
+              </a:ext>
+            </a:extLst>
+          </p:cNvPr>
+          <p:cNvSpPr txBox="1"/>
+          <p:nvPr/>
+        </p:nvSpPr>
+        <p:spPr>
+          <a:xfrm>
+            <a:off x="778413" y="4464621"/>
+            <a:ext cx="8561705" cy="443711"/>
+          </a:xfrm>
+          <a:prstGeom prst="rect">
+            <a:avLst/>
+          </a:prstGeom>
+        </p:spPr>
+        <p:txBody>
+          <a:bodyPr vert="horz" wrap="square" lIns="0" tIns="12700" rIns="0" bIns="0" rtlCol="0">
+            <a:spAutoFit/>
+          </a:bodyPr>
+          <a:lstStyle/>
+          <a:p>
+            <a:pPr algn="l" fontAlgn="base"/>
+            <a:r>
+              <a:rPr lang="en-US" sz="1400" dirty="0"/>
+              <a:t>Looping Through a String</a:t>
+            </a:r>
+          </a:p>
+          <a:p>
+            <a:pPr algn="l" fontAlgn="base"/>
+            <a:r>
+              <a:rPr lang="en-US" sz="1400" dirty="0"/>
+              <a:t>Since strings are arrays, we can loop through the characters in a string, with a for loop.</a:t>
+            </a:r>
+          </a:p>
+        </p:txBody>
+      </p:sp>
       <p:pic>
         <p:nvPicPr>
-          <p:cNvPr id="8" name="תמונה 7">
+          <p:cNvPr id="10" name="תמונה 9">
             <a:extLst>
               <a:ext uri="{FF2B5EF4-FFF2-40B4-BE49-F238E27FC236}">
-                <a16:creationId xmlns:a16="http://schemas.microsoft.com/office/drawing/2014/main" id="{82122D81-624B-47D2-AF26-4F729DD97DF0}"/>
+                <a16:creationId xmlns:a16="http://schemas.microsoft.com/office/drawing/2014/main" id="{583FF1FD-9A34-44F3-8C9F-82F058EB2BE0}"/>
               </a:ext>
             </a:extLst>
           </p:cNvPr>
@@ -7279,15 +7333,46 @@
           </p:cNvPicPr>
           <p:nvPr/>
         </p:nvPicPr>
-        <p:blipFill rotWithShape="1">
+        <p:blipFill>
           <a:blip r:embed="rId3"/>
-          <a:srcRect r="7158"/>
-          <a:stretch/>
+          <a:stretch>
+            <a:fillRect/>
+          </a:stretch>
         </p:blipFill>
         <p:spPr>
           <a:xfrm>
-            <a:off x="5865206" y="2352714"/>
-            <a:ext cx="4200525" cy="2190751"/>
+            <a:off x="778413" y="5320761"/>
+            <a:ext cx="3943351" cy="981075"/>
+          </a:xfrm>
+          <a:prstGeom prst="rect">
+            <a:avLst/>
+          </a:prstGeom>
+        </p:spPr>
+      </p:pic>
+      <p:pic>
+        <p:nvPicPr>
+          <p:cNvPr id="12" name="תמונה 11">
+            <a:extLst>
+              <a:ext uri="{FF2B5EF4-FFF2-40B4-BE49-F238E27FC236}">
+                <a16:creationId xmlns:a16="http://schemas.microsoft.com/office/drawing/2014/main" id="{E099260C-0FC3-4AFC-BB70-A0E3F1C8677B}"/>
+              </a:ext>
+            </a:extLst>
+          </p:cNvPr>
+          <p:cNvPicPr>
+            <a:picLocks noChangeAspect="1"/>
+          </p:cNvPicPr>
+          <p:nvPr/>
+        </p:nvPicPr>
+        <p:blipFill>
+          <a:blip r:embed="rId4"/>
+          <a:stretch>
+            <a:fillRect/>
+          </a:stretch>
+        </p:blipFill>
+        <p:spPr>
+          <a:xfrm>
+            <a:off x="5536150" y="5101685"/>
+            <a:ext cx="695325" cy="1419225"/>
           </a:xfrm>
           <a:prstGeom prst="rect">
             <a:avLst/>
@@ -7297,7 +7382,7 @@
     </p:spTree>
     <p:extLst>
       <p:ext uri="{BB962C8B-B14F-4D97-AF65-F5344CB8AC3E}">
-        <p14:creationId xmlns:p14="http://schemas.microsoft.com/office/powerpoint/2010/main" val="3664646228"/>
+        <p14:creationId xmlns:p14="http://schemas.microsoft.com/office/powerpoint/2010/main" val="997093589"/>
       </p:ext>
     </p:extLst>
   </p:cSld>
@@ -7332,7 +7417,7 @@
         </p:nvSpPr>
         <p:spPr>
           <a:xfrm>
-            <a:off x="778412" y="426611"/>
+            <a:off x="698403" y="287523"/>
             <a:ext cx="10210800" cy="505267"/>
           </a:xfrm>
           <a:prstGeom prst="rect">
@@ -7352,20 +7437,17 @@
             </a:pPr>
             <a:r>
               <a:rPr lang="fr-FR" sz="3200" dirty="0">
-                <a:latin typeface="+mj-lt"/>
                 <a:cs typeface="Trebuchet MS"/>
               </a:rPr>
               <a:t>Strings are </a:t>
             </a:r>
             <a:r>
               <a:rPr lang="fr-FR" sz="3200" dirty="0" err="1">
-                <a:latin typeface="+mj-lt"/>
                 <a:cs typeface="Trebuchet MS"/>
               </a:rPr>
               <a:t>Arrays</a:t>
             </a:r>
             <a:endParaRPr lang="en-US" sz="3200" dirty="0">
-              <a:latin typeface="+mj-lt"/>
               <a:cs typeface="Trebuchet MS"/>
             </a:endParaRPr>
           </a:p>
@@ -7385,8 +7467,8 @@
         </p:nvSpPr>
         <p:spPr>
           <a:xfrm>
-            <a:off x="778413" y="1179042"/>
-            <a:ext cx="8561705" cy="1520929"/>
+            <a:off x="742365" y="999031"/>
+            <a:ext cx="8561705" cy="443711"/>
           </a:xfrm>
           <a:prstGeom prst="rect">
             <a:avLst/>
@@ -7401,47 +7483,74 @@
             <a:pPr algn="l" fontAlgn="base"/>
             <a:r>
               <a:rPr lang="en-US" sz="1400" dirty="0"/>
-              <a:t>Like many other popular programming languages, strings in Python are arrays of bytes representing </a:t>
+              <a:t>String Length</a:t>
+            </a:r>
+          </a:p>
+          <a:p>
+            <a:pPr algn="l" fontAlgn="base"/>
+            <a:r>
+              <a:rPr lang="en-US" sz="1400" dirty="0"/>
+              <a:t>To get the length of a string, use the </a:t>
             </a:r>
             <a:r>
               <a:rPr lang="en-US" sz="1400" dirty="0" err="1"/>
-              <a:t>unicode</a:t>
+              <a:t>len</a:t>
             </a:r>
             <a:r>
               <a:rPr lang="en-US" sz="1400" dirty="0"/>
-              <a:t> characters.</a:t>
-            </a:r>
-          </a:p>
+              <a:t>() function.</a:t>
+            </a:r>
+          </a:p>
+        </p:txBody>
+      </p:sp>
+      <p:sp>
+        <p:nvSpPr>
+          <p:cNvPr id="9" name="object 3">
+            <a:extLst>
+              <a:ext uri="{FF2B5EF4-FFF2-40B4-BE49-F238E27FC236}">
+                <a16:creationId xmlns:a16="http://schemas.microsoft.com/office/drawing/2014/main" id="{F5C3D585-7BD8-4051-BEBD-72C19B1A630D}"/>
+              </a:ext>
+            </a:extLst>
+          </p:cNvPr>
+          <p:cNvSpPr txBox="1"/>
+          <p:nvPr/>
+        </p:nvSpPr>
+        <p:spPr>
+          <a:xfrm>
+            <a:off x="698404" y="3024709"/>
+            <a:ext cx="8561705" cy="443711"/>
+          </a:xfrm>
+          <a:prstGeom prst="rect">
+            <a:avLst/>
+          </a:prstGeom>
+        </p:spPr>
+        <p:txBody>
+          <a:bodyPr vert="horz" wrap="square" lIns="0" tIns="12700" rIns="0" bIns="0" rtlCol="0">
+            <a:spAutoFit/>
+          </a:bodyPr>
+          <a:lstStyle/>
           <a:p>
             <a:pPr algn="l" fontAlgn="base"/>
-            <a:endParaRPr lang="en-US" sz="1400" dirty="0"/>
+            <a:r>
+              <a:rPr lang="en-US" sz="1400" dirty="0"/>
+              <a:t>Check String</a:t>
+            </a:r>
           </a:p>
           <a:p>
             <a:pPr algn="l" fontAlgn="base"/>
             <a:r>
               <a:rPr lang="en-US" sz="1400" dirty="0"/>
-              <a:t>However, Python does not have a character data type, a single character is simply a string with a length of 1.</a:t>
-            </a:r>
-          </a:p>
-          <a:p>
-            <a:pPr algn="l" fontAlgn="base"/>
-            <a:endParaRPr lang="en-US" sz="1400" dirty="0"/>
-          </a:p>
-          <a:p>
-            <a:pPr algn="l" fontAlgn="base"/>
-            <a:r>
-              <a:rPr lang="en-US" sz="1400" dirty="0"/>
-              <a:t>Square brackets can be used to access elements of the string.</a:t>
+              <a:t>To check if a certain phrase or character is present in a string, we can use the keyword in.</a:t>
             </a:r>
           </a:p>
         </p:txBody>
       </p:sp>
       <p:pic>
         <p:nvPicPr>
-          <p:cNvPr id="4" name="תמונה 3">
+          <p:cNvPr id="5" name="תמונה 4">
             <a:extLst>
               <a:ext uri="{FF2B5EF4-FFF2-40B4-BE49-F238E27FC236}">
-                <a16:creationId xmlns:a16="http://schemas.microsoft.com/office/drawing/2014/main" id="{75B500B3-1D2E-4CE4-9CA7-1598DBC66A0F}"/>
+                <a16:creationId xmlns:a16="http://schemas.microsoft.com/office/drawing/2014/main" id="{31027F4B-26CF-4EC2-914F-E8FAC51F8A1B}"/>
               </a:ext>
             </a:extLst>
           </p:cNvPr>
@@ -7458,62 +7567,20 @@
         </p:blipFill>
         <p:spPr>
           <a:xfrm>
-            <a:off x="778412" y="2737740"/>
-            <a:ext cx="6486525" cy="1314451"/>
+            <a:off x="698403" y="1442742"/>
+            <a:ext cx="5143500" cy="1352551"/>
           </a:xfrm>
           <a:prstGeom prst="rect">
             <a:avLst/>
           </a:prstGeom>
         </p:spPr>
       </p:pic>
-      <p:sp>
-        <p:nvSpPr>
-          <p:cNvPr id="9" name="object 3">
+      <p:pic>
+        <p:nvPicPr>
+          <p:cNvPr id="8" name="תמונה 7">
             <a:extLst>
               <a:ext uri="{FF2B5EF4-FFF2-40B4-BE49-F238E27FC236}">
-                <a16:creationId xmlns:a16="http://schemas.microsoft.com/office/drawing/2014/main" id="{F5C3D585-7BD8-4051-BEBD-72C19B1A630D}"/>
-              </a:ext>
-            </a:extLst>
-          </p:cNvPr>
-          <p:cNvSpPr txBox="1"/>
-          <p:nvPr/>
-        </p:nvSpPr>
-        <p:spPr>
-          <a:xfrm>
-            <a:off x="778413" y="4464621"/>
-            <a:ext cx="8561705" cy="443711"/>
-          </a:xfrm>
-          <a:prstGeom prst="rect">
-            <a:avLst/>
-          </a:prstGeom>
-        </p:spPr>
-        <p:txBody>
-          <a:bodyPr vert="horz" wrap="square" lIns="0" tIns="12700" rIns="0" bIns="0" rtlCol="0">
-            <a:spAutoFit/>
-          </a:bodyPr>
-          <a:lstStyle/>
-          <a:p>
-            <a:pPr algn="l" fontAlgn="base"/>
-            <a:r>
-              <a:rPr lang="en-US" sz="1400" dirty="0"/>
-              <a:t>Looping Through a String</a:t>
-            </a:r>
-          </a:p>
-          <a:p>
-            <a:pPr algn="l" fontAlgn="base"/>
-            <a:r>
-              <a:rPr lang="en-US" sz="1400" dirty="0"/>
-              <a:t>Since strings are arrays, we can loop through the characters in a string, with a for loop.</a:t>
-            </a:r>
-          </a:p>
-        </p:txBody>
-      </p:sp>
-      <p:pic>
-        <p:nvPicPr>
-          <p:cNvPr id="10" name="תמונה 9">
-            <a:extLst>
-              <a:ext uri="{FF2B5EF4-FFF2-40B4-BE49-F238E27FC236}">
-                <a16:creationId xmlns:a16="http://schemas.microsoft.com/office/drawing/2014/main" id="{583FF1FD-9A34-44F3-8C9F-82F058EB2BE0}"/>
+                <a16:creationId xmlns:a16="http://schemas.microsoft.com/office/drawing/2014/main" id="{CC7090C9-C025-49B2-B122-9F2089F1A5E5}"/>
               </a:ext>
             </a:extLst>
           </p:cNvPr>
@@ -7522,16 +7589,15 @@
           </p:cNvPicPr>
           <p:nvPr/>
         </p:nvPicPr>
-        <p:blipFill>
+        <p:blipFill rotWithShape="1">
           <a:blip r:embed="rId3"/>
-          <a:stretch>
-            <a:fillRect/>
-          </a:stretch>
+          <a:srcRect b="10943"/>
+          <a:stretch/>
         </p:blipFill>
         <p:spPr>
           <a:xfrm>
-            <a:off x="778413" y="5320761"/>
-            <a:ext cx="3943351" cy="981075"/>
+            <a:off x="698402" y="3468419"/>
+            <a:ext cx="5355103" cy="2900344"/>
           </a:xfrm>
           <a:prstGeom prst="rect">
             <a:avLst/>
@@ -7540,10 +7606,10 @@
       </p:pic>
       <p:pic>
         <p:nvPicPr>
-          <p:cNvPr id="12" name="תמונה 11">
+          <p:cNvPr id="13" name="תמונה 12">
             <a:extLst>
               <a:ext uri="{FF2B5EF4-FFF2-40B4-BE49-F238E27FC236}">
-                <a16:creationId xmlns:a16="http://schemas.microsoft.com/office/drawing/2014/main" id="{E099260C-0FC3-4AFC-BB70-A0E3F1C8677B}"/>
+                <a16:creationId xmlns:a16="http://schemas.microsoft.com/office/drawing/2014/main" id="{4F9797D7-05F5-44E8-ABE4-5F58621429D7}"/>
               </a:ext>
             </a:extLst>
           </p:cNvPr>
@@ -7560,8 +7626,38 @@
         </p:blipFill>
         <p:spPr>
           <a:xfrm>
-            <a:off x="5536150" y="5101685"/>
-            <a:ext cx="695325" cy="1419225"/>
+            <a:off x="6053504" y="4077899"/>
+            <a:ext cx="2000251" cy="685800"/>
+          </a:xfrm>
+          <a:prstGeom prst="rect">
+            <a:avLst/>
+          </a:prstGeom>
+        </p:spPr>
+      </p:pic>
+      <p:pic>
+        <p:nvPicPr>
+          <p:cNvPr id="15" name="תמונה 14">
+            <a:extLst>
+              <a:ext uri="{FF2B5EF4-FFF2-40B4-BE49-F238E27FC236}">
+                <a16:creationId xmlns:a16="http://schemas.microsoft.com/office/drawing/2014/main" id="{25259CB9-E05A-4486-9BE4-D654055F322D}"/>
+              </a:ext>
+            </a:extLst>
+          </p:cNvPr>
+          <p:cNvPicPr>
+            <a:picLocks noChangeAspect="1"/>
+          </p:cNvPicPr>
+          <p:nvPr/>
+        </p:nvPicPr>
+        <p:blipFill>
+          <a:blip r:embed="rId5"/>
+          <a:stretch>
+            <a:fillRect/>
+          </a:stretch>
+        </p:blipFill>
+        <p:spPr>
+          <a:xfrm>
+            <a:off x="6053504" y="5616288"/>
+            <a:ext cx="2686051" cy="752475"/>
           </a:xfrm>
           <a:prstGeom prst="rect">
             <a:avLst/>
@@ -7571,7 +7667,7 @@
     </p:spTree>
     <p:extLst>
       <p:ext uri="{BB962C8B-B14F-4D97-AF65-F5344CB8AC3E}">
-        <p14:creationId xmlns:p14="http://schemas.microsoft.com/office/powerpoint/2010/main" val="997093589"/>
+        <p14:creationId xmlns:p14="http://schemas.microsoft.com/office/powerpoint/2010/main" val="637131004"/>
       </p:ext>
     </p:extLst>
   </p:cSld>
@@ -7606,7 +7702,7 @@
         </p:nvSpPr>
         <p:spPr>
           <a:xfrm>
-            <a:off x="698403" y="287523"/>
+            <a:off x="633503" y="362805"/>
             <a:ext cx="10210800" cy="505267"/>
           </a:xfrm>
           <a:prstGeom prst="rect">
@@ -7656,7 +7752,7 @@
         </p:nvSpPr>
         <p:spPr>
           <a:xfrm>
-            <a:off x="742365" y="999031"/>
+            <a:off x="639446" y="1188099"/>
             <a:ext cx="8561705" cy="443711"/>
           </a:xfrm>
           <a:prstGeom prst="rect">
@@ -7672,74 +7768,24 @@
             <a:pPr algn="l" fontAlgn="base"/>
             <a:r>
               <a:rPr lang="en-US" sz="1400" dirty="0"/>
-              <a:t>String Length</a:t>
+              <a:t>Check if NOT</a:t>
             </a:r>
           </a:p>
           <a:p>
             <a:pPr algn="l" fontAlgn="base"/>
             <a:r>
               <a:rPr lang="en-US" sz="1400" dirty="0"/>
-              <a:t>To get the length of a string, use the </a:t>
-            </a:r>
-            <a:r>
-              <a:rPr lang="en-US" sz="1400" dirty="0" err="1"/>
-              <a:t>len</a:t>
-            </a:r>
-            <a:r>
-              <a:rPr lang="en-US" sz="1400" dirty="0"/>
-              <a:t>() function.</a:t>
-            </a:r>
-          </a:p>
-        </p:txBody>
-      </p:sp>
-      <p:sp>
-        <p:nvSpPr>
-          <p:cNvPr id="9" name="object 3">
+              <a:t>To check if a certain phrase or character is NOT present in a string, we can use the keyword not in.</a:t>
+            </a:r>
+          </a:p>
+        </p:txBody>
+      </p:sp>
+      <p:pic>
+        <p:nvPicPr>
+          <p:cNvPr id="4" name="תמונה 3">
             <a:extLst>
               <a:ext uri="{FF2B5EF4-FFF2-40B4-BE49-F238E27FC236}">
-                <a16:creationId xmlns:a16="http://schemas.microsoft.com/office/drawing/2014/main" id="{F5C3D585-7BD8-4051-BEBD-72C19B1A630D}"/>
-              </a:ext>
-            </a:extLst>
-          </p:cNvPr>
-          <p:cNvSpPr txBox="1"/>
-          <p:nvPr/>
-        </p:nvSpPr>
-        <p:spPr>
-          <a:xfrm>
-            <a:off x="698404" y="3024709"/>
-            <a:ext cx="8561705" cy="443711"/>
-          </a:xfrm>
-          <a:prstGeom prst="rect">
-            <a:avLst/>
-          </a:prstGeom>
-        </p:spPr>
-        <p:txBody>
-          <a:bodyPr vert="horz" wrap="square" lIns="0" tIns="12700" rIns="0" bIns="0" rtlCol="0">
-            <a:spAutoFit/>
-          </a:bodyPr>
-          <a:lstStyle/>
-          <a:p>
-            <a:pPr algn="l" fontAlgn="base"/>
-            <a:r>
-              <a:rPr lang="en-US" sz="1400" dirty="0"/>
-              <a:t>Check String</a:t>
-            </a:r>
-          </a:p>
-          <a:p>
-            <a:pPr algn="l" fontAlgn="base"/>
-            <a:r>
-              <a:rPr lang="en-US" sz="1400" dirty="0"/>
-              <a:t>To check if a certain phrase or character is present in a string, we can use the keyword in.</a:t>
-            </a:r>
-          </a:p>
-        </p:txBody>
-      </p:sp>
-      <p:pic>
-        <p:nvPicPr>
-          <p:cNvPr id="5" name="תמונה 4">
-            <a:extLst>
-              <a:ext uri="{FF2B5EF4-FFF2-40B4-BE49-F238E27FC236}">
-                <a16:creationId xmlns:a16="http://schemas.microsoft.com/office/drawing/2014/main" id="{31027F4B-26CF-4EC2-914F-E8FAC51F8A1B}"/>
+                <a16:creationId xmlns:a16="http://schemas.microsoft.com/office/drawing/2014/main" id="{36B9088A-ADC4-47CC-A674-83166C6E9F34}"/>
               </a:ext>
             </a:extLst>
           </p:cNvPr>
@@ -7756,8 +7802,8 @@
         </p:blipFill>
         <p:spPr>
           <a:xfrm>
-            <a:off x="698403" y="1442742"/>
-            <a:ext cx="5143500" cy="1352551"/>
+            <a:off x="633502" y="1851039"/>
+            <a:ext cx="6457951" cy="1409700"/>
           </a:xfrm>
           <a:prstGeom prst="rect">
             <a:avLst/>
@@ -7766,10 +7812,10 @@
       </p:pic>
       <p:pic>
         <p:nvPicPr>
-          <p:cNvPr id="8" name="תמונה 7">
+          <p:cNvPr id="10" name="תמונה 9">
             <a:extLst>
               <a:ext uri="{FF2B5EF4-FFF2-40B4-BE49-F238E27FC236}">
-                <a16:creationId xmlns:a16="http://schemas.microsoft.com/office/drawing/2014/main" id="{CC7090C9-C025-49B2-B122-9F2089F1A5E5}"/>
+                <a16:creationId xmlns:a16="http://schemas.microsoft.com/office/drawing/2014/main" id="{FBC61EF5-5339-4909-9589-61A81296E5D6}"/>
               </a:ext>
             </a:extLst>
           </p:cNvPr>
@@ -7778,15 +7824,16 @@
           </p:cNvPicPr>
           <p:nvPr/>
         </p:nvPicPr>
-        <p:blipFill rotWithShape="1">
+        <p:blipFill>
           <a:blip r:embed="rId3"/>
-          <a:srcRect b="10943"/>
-          <a:stretch/>
+          <a:stretch>
+            <a:fillRect/>
+          </a:stretch>
         </p:blipFill>
         <p:spPr>
           <a:xfrm>
-            <a:off x="698402" y="3468419"/>
-            <a:ext cx="5355103" cy="2900344"/>
+            <a:off x="633501" y="4028146"/>
+            <a:ext cx="5962651" cy="1552575"/>
           </a:xfrm>
           <a:prstGeom prst="rect">
             <a:avLst/>
@@ -7795,10 +7842,10 @@
       </p:pic>
       <p:pic>
         <p:nvPicPr>
-          <p:cNvPr id="13" name="תמונה 12">
+          <p:cNvPr id="3" name="תמונה 2">
             <a:extLst>
               <a:ext uri="{FF2B5EF4-FFF2-40B4-BE49-F238E27FC236}">
-                <a16:creationId xmlns:a16="http://schemas.microsoft.com/office/drawing/2014/main" id="{4F9797D7-05F5-44E8-ABE4-5F58621429D7}"/>
+                <a16:creationId xmlns:a16="http://schemas.microsoft.com/office/drawing/2014/main" id="{2F1998B0-91DD-2D5B-0162-EEFAE03C94C2}"/>
               </a:ext>
             </a:extLst>
           </p:cNvPr>
@@ -7815,8 +7862,8 @@
         </p:blipFill>
         <p:spPr>
           <a:xfrm>
-            <a:off x="6053504" y="4077899"/>
-            <a:ext cx="2000251" cy="685800"/>
+            <a:off x="7091452" y="2532406"/>
+            <a:ext cx="2000251" cy="728333"/>
           </a:xfrm>
           <a:prstGeom prst="rect">
             <a:avLst/>
@@ -7825,10 +7872,10 @@
       </p:pic>
       <p:pic>
         <p:nvPicPr>
-          <p:cNvPr id="15" name="תמונה 14">
+          <p:cNvPr id="7" name="תמונה 6">
             <a:extLst>
               <a:ext uri="{FF2B5EF4-FFF2-40B4-BE49-F238E27FC236}">
-                <a16:creationId xmlns:a16="http://schemas.microsoft.com/office/drawing/2014/main" id="{25259CB9-E05A-4486-9BE4-D654055F322D}"/>
+                <a16:creationId xmlns:a16="http://schemas.microsoft.com/office/drawing/2014/main" id="{57898743-DE54-C69D-F4DD-6A3D2DF13729}"/>
               </a:ext>
             </a:extLst>
           </p:cNvPr>
@@ -7845,8 +7892,8 @@
         </p:blipFill>
         <p:spPr>
           <a:xfrm>
-            <a:off x="6053504" y="5616288"/>
-            <a:ext cx="2686051" cy="752475"/>
+            <a:off x="6589485" y="5059994"/>
+            <a:ext cx="2876699" cy="520727"/>
           </a:xfrm>
           <a:prstGeom prst="rect">
             <a:avLst/>
@@ -7856,7 +7903,7 @@
     </p:spTree>
     <p:extLst>
       <p:ext uri="{BB962C8B-B14F-4D97-AF65-F5344CB8AC3E}">
-        <p14:creationId xmlns:p14="http://schemas.microsoft.com/office/powerpoint/2010/main" val="637131004"/>
+        <p14:creationId xmlns:p14="http://schemas.microsoft.com/office/powerpoint/2010/main" val="3250829706"/>
       </p:ext>
     </p:extLst>
   </p:cSld>
@@ -7891,7 +7938,7 @@
         </p:nvSpPr>
         <p:spPr>
           <a:xfrm>
-            <a:off x="633503" y="362805"/>
+            <a:off x="961292" y="312421"/>
             <a:ext cx="10210800" cy="505267"/>
           </a:xfrm>
           <a:prstGeom prst="rect">
@@ -7911,70 +7958,24 @@
             </a:pPr>
             <a:r>
               <a:rPr lang="fr-FR" sz="3200" dirty="0">
+                <a:latin typeface="+mj-lt"/>
                 <a:cs typeface="Trebuchet MS"/>
               </a:rPr>
-              <a:t>Strings are </a:t>
-            </a:r>
-            <a:r>
-              <a:rPr lang="fr-FR" sz="3200" dirty="0" err="1">
-                <a:cs typeface="Trebuchet MS"/>
-              </a:rPr>
-              <a:t>Arrays</a:t>
+              <a:t>Strings</a:t>
             </a:r>
             <a:endParaRPr lang="en-US" sz="3200" dirty="0">
+              <a:latin typeface="+mj-lt"/>
               <a:cs typeface="Trebuchet MS"/>
             </a:endParaRPr>
           </a:p>
         </p:txBody>
       </p:sp>
-      <p:sp>
-        <p:nvSpPr>
-          <p:cNvPr id="6" name="object 3">
+      <p:pic>
+        <p:nvPicPr>
+          <p:cNvPr id="5" name="תמונה 4">
             <a:extLst>
               <a:ext uri="{FF2B5EF4-FFF2-40B4-BE49-F238E27FC236}">
-                <a16:creationId xmlns:a16="http://schemas.microsoft.com/office/drawing/2014/main" id="{504C54EB-F689-45AF-9B50-A537385B0172}"/>
-              </a:ext>
-            </a:extLst>
-          </p:cNvPr>
-          <p:cNvSpPr txBox="1"/>
-          <p:nvPr/>
-        </p:nvSpPr>
-        <p:spPr>
-          <a:xfrm>
-            <a:off x="639446" y="1188099"/>
-            <a:ext cx="8561705" cy="443711"/>
-          </a:xfrm>
-          <a:prstGeom prst="rect">
-            <a:avLst/>
-          </a:prstGeom>
-        </p:spPr>
-        <p:txBody>
-          <a:bodyPr vert="horz" wrap="square" lIns="0" tIns="12700" rIns="0" bIns="0" rtlCol="0">
-            <a:spAutoFit/>
-          </a:bodyPr>
-          <a:lstStyle/>
-          <a:p>
-            <a:pPr algn="l" fontAlgn="base"/>
-            <a:r>
-              <a:rPr lang="en-US" sz="1400" dirty="0"/>
-              <a:t>Check if NOT</a:t>
-            </a:r>
-          </a:p>
-          <a:p>
-            <a:pPr algn="l" fontAlgn="base"/>
-            <a:r>
-              <a:rPr lang="en-US" sz="1400" dirty="0"/>
-              <a:t>To check if a certain phrase or character is NOT present in a string, we can use the keyword not in.</a:t>
-            </a:r>
-          </a:p>
-        </p:txBody>
-      </p:sp>
-      <p:pic>
-        <p:nvPicPr>
-          <p:cNvPr id="4" name="תמונה 3">
-            <a:extLst>
-              <a:ext uri="{FF2B5EF4-FFF2-40B4-BE49-F238E27FC236}">
-                <a16:creationId xmlns:a16="http://schemas.microsoft.com/office/drawing/2014/main" id="{36B9088A-ADC4-47CC-A674-83166C6E9F34}"/>
+                <a16:creationId xmlns:a16="http://schemas.microsoft.com/office/drawing/2014/main" id="{4B83BBE7-E808-42BC-B62E-6169E0F1FB63}"/>
               </a:ext>
             </a:extLst>
           </p:cNvPr>
@@ -7991,98 +7992,8 @@
         </p:blipFill>
         <p:spPr>
           <a:xfrm>
-            <a:off x="633502" y="1851039"/>
-            <a:ext cx="6457951" cy="1409700"/>
-          </a:xfrm>
-          <a:prstGeom prst="rect">
-            <a:avLst/>
-          </a:prstGeom>
-        </p:spPr>
-      </p:pic>
-      <p:pic>
-        <p:nvPicPr>
-          <p:cNvPr id="10" name="תמונה 9">
-            <a:extLst>
-              <a:ext uri="{FF2B5EF4-FFF2-40B4-BE49-F238E27FC236}">
-                <a16:creationId xmlns:a16="http://schemas.microsoft.com/office/drawing/2014/main" id="{FBC61EF5-5339-4909-9589-61A81296E5D6}"/>
-              </a:ext>
-            </a:extLst>
-          </p:cNvPr>
-          <p:cNvPicPr>
-            <a:picLocks noChangeAspect="1"/>
-          </p:cNvPicPr>
-          <p:nvPr/>
-        </p:nvPicPr>
-        <p:blipFill>
-          <a:blip r:embed="rId3"/>
-          <a:stretch>
-            <a:fillRect/>
-          </a:stretch>
-        </p:blipFill>
-        <p:spPr>
-          <a:xfrm>
-            <a:off x="633501" y="4028146"/>
-            <a:ext cx="5962651" cy="1552575"/>
-          </a:xfrm>
-          <a:prstGeom prst="rect">
-            <a:avLst/>
-          </a:prstGeom>
-        </p:spPr>
-      </p:pic>
-      <p:pic>
-        <p:nvPicPr>
-          <p:cNvPr id="3" name="תמונה 2">
-            <a:extLst>
-              <a:ext uri="{FF2B5EF4-FFF2-40B4-BE49-F238E27FC236}">
-                <a16:creationId xmlns:a16="http://schemas.microsoft.com/office/drawing/2014/main" id="{2F1998B0-91DD-2D5B-0162-EEFAE03C94C2}"/>
-              </a:ext>
-            </a:extLst>
-          </p:cNvPr>
-          <p:cNvPicPr>
-            <a:picLocks noChangeAspect="1"/>
-          </p:cNvPicPr>
-          <p:nvPr/>
-        </p:nvPicPr>
-        <p:blipFill>
-          <a:blip r:embed="rId4"/>
-          <a:stretch>
-            <a:fillRect/>
-          </a:stretch>
-        </p:blipFill>
-        <p:spPr>
-          <a:xfrm>
-            <a:off x="7091452" y="2532406"/>
-            <a:ext cx="2000251" cy="728333"/>
-          </a:xfrm>
-          <a:prstGeom prst="rect">
-            <a:avLst/>
-          </a:prstGeom>
-        </p:spPr>
-      </p:pic>
-      <p:pic>
-        <p:nvPicPr>
-          <p:cNvPr id="7" name="תמונה 6">
-            <a:extLst>
-              <a:ext uri="{FF2B5EF4-FFF2-40B4-BE49-F238E27FC236}">
-                <a16:creationId xmlns:a16="http://schemas.microsoft.com/office/drawing/2014/main" id="{57898743-DE54-C69D-F4DD-6A3D2DF13729}"/>
-              </a:ext>
-            </a:extLst>
-          </p:cNvPr>
-          <p:cNvPicPr>
-            <a:picLocks noChangeAspect="1"/>
-          </p:cNvPicPr>
-          <p:nvPr/>
-        </p:nvPicPr>
-        <p:blipFill>
-          <a:blip r:embed="rId5"/>
-          <a:stretch>
-            <a:fillRect/>
-          </a:stretch>
-        </p:blipFill>
-        <p:spPr>
-          <a:xfrm>
-            <a:off x="6589485" y="5059994"/>
-            <a:ext cx="2876699" cy="520727"/>
+            <a:off x="823068" y="998220"/>
+            <a:ext cx="11083139" cy="5547360"/>
           </a:xfrm>
           <a:prstGeom prst="rect">
             <a:avLst/>
@@ -8092,7 +8003,7 @@
     </p:spTree>
     <p:extLst>
       <p:ext uri="{BB962C8B-B14F-4D97-AF65-F5344CB8AC3E}">
-        <p14:creationId xmlns:p14="http://schemas.microsoft.com/office/powerpoint/2010/main" val="3250829706"/>
+        <p14:creationId xmlns:p14="http://schemas.microsoft.com/office/powerpoint/2010/main" val="532863263"/>
       </p:ext>
     </p:extLst>
   </p:cSld>
@@ -8127,7 +8038,7 @@
         </p:nvSpPr>
         <p:spPr>
           <a:xfrm>
-            <a:off x="961292" y="312421"/>
+            <a:off x="984152" y="332934"/>
             <a:ext cx="10210800" cy="505267"/>
           </a:xfrm>
           <a:prstGeom prst="rect">
@@ -8147,13 +8058,11 @@
             </a:pPr>
             <a:r>
               <a:rPr lang="fr-FR" sz="3200" dirty="0">
-                <a:latin typeface="+mj-lt"/>
                 <a:cs typeface="Trebuchet MS"/>
               </a:rPr>
               <a:t>Strings</a:t>
             </a:r>
             <a:endParaRPr lang="en-US" sz="3200" dirty="0">
-              <a:latin typeface="+mj-lt"/>
               <a:cs typeface="Trebuchet MS"/>
             </a:endParaRPr>
           </a:p>
@@ -8161,10 +8070,10 @@
       </p:sp>
       <p:pic>
         <p:nvPicPr>
-          <p:cNvPr id="5" name="תמונה 4">
+          <p:cNvPr id="4" name="תמונה 3">
             <a:extLst>
               <a:ext uri="{FF2B5EF4-FFF2-40B4-BE49-F238E27FC236}">
-                <a16:creationId xmlns:a16="http://schemas.microsoft.com/office/drawing/2014/main" id="{4B83BBE7-E808-42BC-B62E-6169E0F1FB63}"/>
+                <a16:creationId xmlns:a16="http://schemas.microsoft.com/office/drawing/2014/main" id="{53BB4B48-58F6-4B21-881B-DB6A0A4CF3A7}"/>
               </a:ext>
             </a:extLst>
           </p:cNvPr>
@@ -8181,8 +8090,8 @@
         </p:blipFill>
         <p:spPr>
           <a:xfrm>
-            <a:off x="823068" y="998220"/>
-            <a:ext cx="11083139" cy="5547360"/>
+            <a:off x="984153" y="1066800"/>
+            <a:ext cx="10061439" cy="5217043"/>
           </a:xfrm>
           <a:prstGeom prst="rect">
             <a:avLst/>
@@ -8192,7 +8101,7 @@
     </p:spTree>
     <p:extLst>
       <p:ext uri="{BB962C8B-B14F-4D97-AF65-F5344CB8AC3E}">
-        <p14:creationId xmlns:p14="http://schemas.microsoft.com/office/powerpoint/2010/main" val="532863263"/>
+        <p14:creationId xmlns:p14="http://schemas.microsoft.com/office/powerpoint/2010/main" val="3629186266"/>
       </p:ext>
     </p:extLst>
   </p:cSld>
@@ -8221,56 +8130,87 @@
       </p:grpSpPr>
       <p:sp>
         <p:nvSpPr>
-          <p:cNvPr id="2" name="Title 1">
+          <p:cNvPr id="4" name="object 2">
             <a:extLst>
               <a:ext uri="{FF2B5EF4-FFF2-40B4-BE49-F238E27FC236}">
-                <a16:creationId xmlns:a16="http://schemas.microsoft.com/office/drawing/2014/main" id="{A1C8CC72-8287-EE4D-8114-149296622EE0}"/>
+                <a16:creationId xmlns:a16="http://schemas.microsoft.com/office/drawing/2014/main" id="{1A6C1642-1A5D-9546-8C71-E1FD791820CD}"/>
               </a:ext>
             </a:extLst>
           </p:cNvPr>
-          <p:cNvSpPr>
-            <a:spLocks noGrp="1"/>
-          </p:cNvSpPr>
-          <p:nvPr>
-            <p:ph type="ctrTitle"/>
-          </p:nvPr>
-        </p:nvSpPr>
-        <p:spPr/>
-        <p:txBody>
-          <a:bodyPr>
-            <a:normAutofit/>
+          <p:cNvSpPr txBox="1"/>
+          <p:nvPr/>
+        </p:nvSpPr>
+        <p:spPr>
+          <a:xfrm>
+            <a:off x="493701" y="332602"/>
+            <a:ext cx="10210800" cy="505267"/>
+          </a:xfrm>
+          <a:prstGeom prst="rect">
+            <a:avLst/>
+          </a:prstGeom>
+        </p:spPr>
+        <p:txBody>
+          <a:bodyPr vert="horz" wrap="square" lIns="0" tIns="12700" rIns="0" bIns="0" rtlCol="0">
+            <a:spAutoFit/>
           </a:bodyPr>
           <a:lstStyle/>
           <a:p>
-            <a:pPr rtl="1"/>
-            <a:r>
-              <a:rPr lang="he-IL" cap="none" dirty="0"/>
-              <a:t>תכנות מונחה עצמים</a:t>
-            </a:r>
-            <a:br>
-              <a:rPr lang="he-IL" cap="none" dirty="0"/>
-            </a:br>
-            <a:r>
-              <a:rPr lang="he-IL" cap="none" dirty="0" err="1"/>
-              <a:t>P</a:t>
-            </a:r>
-            <a:r>
-              <a:rPr lang="en-US" cap="none" dirty="0" err="1"/>
-              <a:t>ython</a:t>
-            </a:r>
-            <a:br>
-              <a:rPr lang="he-IL" cap="none" dirty="0"/>
-            </a:br>
-            <a:endParaRPr lang="en-US" cap="none" dirty="0"/>
+            <a:pPr marL="12700">
+              <a:spcBef>
+                <a:spcPts val="100"/>
+              </a:spcBef>
+            </a:pPr>
+            <a:r>
+              <a:rPr lang="en-US" sz="3200" dirty="0">
+                <a:latin typeface="+mj-lt"/>
+                <a:cs typeface="Trebuchet MS"/>
+              </a:rPr>
+              <a:t>Python syntax basics</a:t>
+            </a:r>
+          </a:p>
+        </p:txBody>
+      </p:sp>
+      <p:sp>
+        <p:nvSpPr>
+          <p:cNvPr id="5" name="object 3">
+            <a:extLst>
+              <a:ext uri="{FF2B5EF4-FFF2-40B4-BE49-F238E27FC236}">
+                <a16:creationId xmlns:a16="http://schemas.microsoft.com/office/drawing/2014/main" id="{195F30B8-B7D5-A749-AF65-1D9743E5C94C}"/>
+              </a:ext>
+            </a:extLst>
+          </p:cNvPr>
+          <p:cNvSpPr txBox="1"/>
+          <p:nvPr/>
+        </p:nvSpPr>
+        <p:spPr>
+          <a:xfrm>
+            <a:off x="493702" y="1821227"/>
+            <a:ext cx="5940351" cy="566822"/>
+          </a:xfrm>
+          <a:prstGeom prst="rect">
+            <a:avLst/>
+          </a:prstGeom>
+        </p:spPr>
+        <p:txBody>
+          <a:bodyPr vert="horz" wrap="square" lIns="0" tIns="12700" rIns="0" bIns="0" rtlCol="0">
+            <a:spAutoFit/>
+          </a:bodyPr>
+          <a:lstStyle/>
+          <a:p>
+            <a:pPr algn="l" fontAlgn="base"/>
+            <a:r>
+              <a:rPr lang="en-US" dirty="0"/>
+              <a:t>In Python, variables are created when you assign a value to it</a:t>
+            </a:r>
           </a:p>
         </p:txBody>
       </p:sp>
       <p:pic>
         <p:nvPicPr>
-          <p:cNvPr id="7" name="תמונה 6" descr="תמונה שמכילה טקסט, גופן, צילום מסך, לוגו&#10;&#10;התיאור נוצר באופן אוטומטי">
+          <p:cNvPr id="6" name="תמונה 7">
             <a:extLst>
               <a:ext uri="{FF2B5EF4-FFF2-40B4-BE49-F238E27FC236}">
-                <a16:creationId xmlns:a16="http://schemas.microsoft.com/office/drawing/2014/main" id="{7584DAEF-9E4A-9406-FAC7-61510D269C1D}"/>
+                <a16:creationId xmlns:a16="http://schemas.microsoft.com/office/drawing/2014/main" id="{CA88EE62-557E-ED4C-AF86-23F55224CA83}"/>
               </a:ext>
             </a:extLst>
           </p:cNvPr>
@@ -8280,87 +8220,55 @@
           <p:nvPr/>
         </p:nvPicPr>
         <p:blipFill>
-          <a:blip r:embed="rId2">
-            <a:extLst>
-              <a:ext uri="{837473B0-CC2E-450A-ABE3-18F120FF3D39}">
-                <a1611:picAttrSrcUrl xmlns:a1611="http://schemas.microsoft.com/office/drawing/2016/11/main" r:id="rId3"/>
-              </a:ext>
-            </a:extLst>
-          </a:blip>
+          <a:blip r:embed="rId2"/>
           <a:stretch>
             <a:fillRect/>
           </a:stretch>
         </p:blipFill>
         <p:spPr>
           <a:xfrm>
-            <a:off x="3301094" y="3429000"/>
-            <a:ext cx="5981700" cy="3143251"/>
+            <a:off x="6617007" y="987457"/>
+            <a:ext cx="4876800" cy="2124075"/>
           </a:xfrm>
           <a:prstGeom prst="rect">
             <a:avLst/>
           </a:prstGeom>
         </p:spPr>
       </p:pic>
-      <p:sp>
-        <p:nvSpPr>
-          <p:cNvPr id="8" name="תיבת טקסט 7">
+      <p:pic>
+        <p:nvPicPr>
+          <p:cNvPr id="7" name="תמונה 9">
             <a:extLst>
               <a:ext uri="{FF2B5EF4-FFF2-40B4-BE49-F238E27FC236}">
-                <a16:creationId xmlns:a16="http://schemas.microsoft.com/office/drawing/2014/main" id="{D1F5CD84-014C-097C-A389-D31906DC73C7}"/>
+                <a16:creationId xmlns:a16="http://schemas.microsoft.com/office/drawing/2014/main" id="{ADBF1FF7-82E0-6647-B755-0DA7E76831B9}"/>
               </a:ext>
             </a:extLst>
           </p:cNvPr>
-          <p:cNvSpPr txBox="1"/>
+          <p:cNvPicPr>
+            <a:picLocks noChangeAspect="1"/>
+          </p:cNvPicPr>
           <p:nvPr/>
-        </p:nvSpPr>
-        <p:spPr>
-          <a:xfrm>
-            <a:off x="3301094" y="6572251"/>
-            <a:ext cx="5981700" cy="230832"/>
-          </a:xfrm>
-          <a:prstGeom prst="rect">
-            <a:avLst/>
-          </a:prstGeom>
-          <a:noFill/>
-        </p:spPr>
-        <p:txBody>
-          <a:bodyPr wrap="square" rtlCol="1">
-            <a:spAutoFit/>
-          </a:bodyPr>
-          <a:lstStyle/>
-          <a:p>
-            <a:r>
-              <a:rPr lang="he-IL" sz="900" dirty="0">
-                <a:hlinkClick r:id="rId3" tooltip="https://wsparrow.blogspot.com/2018/02/how-to-create-quiz-using-python.html"/>
-              </a:rPr>
-              <a:t>תמונה זו</a:t>
-            </a:r>
-            <a:r>
-              <a:rPr lang="he-IL" sz="900" dirty="0"/>
-              <a:t> מאת מחבר לא ידוע ניתן </a:t>
-            </a:r>
-            <a:r>
-              <a:rPr lang="he-IL" sz="900" dirty="0" err="1"/>
-              <a:t>ברשיון</a:t>
-            </a:r>
-            <a:r>
-              <a:rPr lang="he-IL" sz="900" dirty="0"/>
-              <a:t> במסגרת </a:t>
-            </a:r>
-            <a:r>
-              <a:rPr lang="he-IL" sz="900" dirty="0">
-                <a:hlinkClick r:id="rId4" tooltip="https://creativecommons.org/licenses/by-nc-sa/3.0/"/>
-              </a:rPr>
-              <a:t>CC BY-SA-NC</a:t>
-            </a:r>
-            <a:endParaRPr lang="he-IL" sz="900" dirty="0"/>
-          </a:p>
-        </p:txBody>
-      </p:sp>
+        </p:nvPicPr>
+        <p:blipFill>
+          <a:blip r:embed="rId3"/>
+          <a:stretch>
+            <a:fillRect/>
+          </a:stretch>
+        </p:blipFill>
+        <p:spPr>
+          <a:xfrm>
+            <a:off x="2377746" y="3552613"/>
+            <a:ext cx="6076951" cy="2724151"/>
+          </a:xfrm>
+          <a:prstGeom prst="rect">
+            <a:avLst/>
+          </a:prstGeom>
+        </p:spPr>
+      </p:pic>
     </p:spTree>
     <p:extLst>
       <p:ext uri="{BB962C8B-B14F-4D97-AF65-F5344CB8AC3E}">
-        <p14:creationId xmlns:p14="http://schemas.microsoft.com/office/powerpoint/2010/main" val="857098409"/>
+        <p14:creationId xmlns:p14="http://schemas.microsoft.com/office/powerpoint/2010/main" val="1955537094"/>
       </p:ext>
     </p:extLst>
   </p:cSld>
@@ -8387,50 +8295,12 @@
           <a:chExt cx="0" cy="0"/>
         </a:xfrm>
       </p:grpSpPr>
-      <p:sp>
-        <p:nvSpPr>
-          <p:cNvPr id="2" name="object 2"/>
-          <p:cNvSpPr txBox="1"/>
-          <p:nvPr/>
-        </p:nvSpPr>
-        <p:spPr>
-          <a:xfrm>
-            <a:off x="984152" y="332934"/>
-            <a:ext cx="10210800" cy="505267"/>
-          </a:xfrm>
-          <a:prstGeom prst="rect">
-            <a:avLst/>
-          </a:prstGeom>
-        </p:spPr>
-        <p:txBody>
-          <a:bodyPr vert="horz" wrap="square" lIns="0" tIns="12700" rIns="0" bIns="0" rtlCol="0">
-            <a:spAutoFit/>
-          </a:bodyPr>
-          <a:lstStyle/>
-          <a:p>
-            <a:pPr marL="12700">
-              <a:spcBef>
-                <a:spcPts val="100"/>
-              </a:spcBef>
-            </a:pPr>
-            <a:r>
-              <a:rPr lang="fr-FR" sz="3200" dirty="0">
-                <a:cs typeface="Trebuchet MS"/>
-              </a:rPr>
-              <a:t>Strings</a:t>
-            </a:r>
-            <a:endParaRPr lang="en-US" sz="3200" dirty="0">
-              <a:cs typeface="Trebuchet MS"/>
-            </a:endParaRPr>
-          </a:p>
-        </p:txBody>
-      </p:sp>
       <p:pic>
         <p:nvPicPr>
-          <p:cNvPr id="4" name="תמונה 3">
+          <p:cNvPr id="5" name="תמונה 4">
             <a:extLst>
               <a:ext uri="{FF2B5EF4-FFF2-40B4-BE49-F238E27FC236}">
-                <a16:creationId xmlns:a16="http://schemas.microsoft.com/office/drawing/2014/main" id="{53BB4B48-58F6-4B21-881B-DB6A0A4CF3A7}"/>
+                <a16:creationId xmlns:a16="http://schemas.microsoft.com/office/drawing/2014/main" id="{BBC00084-1578-4B20-A6E0-90AB55EA8A49}"/>
               </a:ext>
             </a:extLst>
           </p:cNvPr>
@@ -8447,18 +8317,62 @@
         </p:blipFill>
         <p:spPr>
           <a:xfrm>
-            <a:off x="984153" y="1066800"/>
-            <a:ext cx="10061439" cy="5217043"/>
+            <a:off x="3178712" y="332934"/>
+            <a:ext cx="7462099" cy="6090727"/>
           </a:xfrm>
           <a:prstGeom prst="rect">
             <a:avLst/>
           </a:prstGeom>
         </p:spPr>
       </p:pic>
+      <p:sp>
+        <p:nvSpPr>
+          <p:cNvPr id="4" name="object 2">
+            <a:extLst>
+              <a:ext uri="{FF2B5EF4-FFF2-40B4-BE49-F238E27FC236}">
+                <a16:creationId xmlns:a16="http://schemas.microsoft.com/office/drawing/2014/main" id="{01208E75-2231-B742-A6C7-6852347C8D4B}"/>
+              </a:ext>
+            </a:extLst>
+          </p:cNvPr>
+          <p:cNvSpPr txBox="1"/>
+          <p:nvPr/>
+        </p:nvSpPr>
+        <p:spPr>
+          <a:xfrm>
+            <a:off x="984152" y="332934"/>
+            <a:ext cx="10210800" cy="505267"/>
+          </a:xfrm>
+          <a:prstGeom prst="rect">
+            <a:avLst/>
+          </a:prstGeom>
+        </p:spPr>
+        <p:txBody>
+          <a:bodyPr vert="horz" wrap="square" lIns="0" tIns="12700" rIns="0" bIns="0" rtlCol="0">
+            <a:spAutoFit/>
+          </a:bodyPr>
+          <a:lstStyle/>
+          <a:p>
+            <a:pPr marL="12700">
+              <a:spcBef>
+                <a:spcPts val="100"/>
+              </a:spcBef>
+            </a:pPr>
+            <a:r>
+              <a:rPr lang="fr-FR" sz="3200" dirty="0">
+                <a:cs typeface="Trebuchet MS"/>
+              </a:rPr>
+              <a:t>Strings</a:t>
+            </a:r>
+            <a:endParaRPr lang="en-US" sz="3200" dirty="0">
+              <a:cs typeface="Trebuchet MS"/>
+            </a:endParaRPr>
+          </a:p>
+        </p:txBody>
+      </p:sp>
     </p:spTree>
     <p:extLst>
       <p:ext uri="{BB962C8B-B14F-4D97-AF65-F5344CB8AC3E}">
-        <p14:creationId xmlns:p14="http://schemas.microsoft.com/office/powerpoint/2010/main" val="3629186266"/>
+        <p14:creationId xmlns:p14="http://schemas.microsoft.com/office/powerpoint/2010/main" val="3567495895"/>
       </p:ext>
     </p:extLst>
   </p:cSld>
@@ -8507,110 +8421,6 @@
         </p:blipFill>
         <p:spPr>
           <a:xfrm>
-            <a:off x="3178712" y="332934"/>
-            <a:ext cx="7462099" cy="6090727"/>
-          </a:xfrm>
-          <a:prstGeom prst="rect">
-            <a:avLst/>
-          </a:prstGeom>
-        </p:spPr>
-      </p:pic>
-      <p:sp>
-        <p:nvSpPr>
-          <p:cNvPr id="4" name="object 2">
-            <a:extLst>
-              <a:ext uri="{FF2B5EF4-FFF2-40B4-BE49-F238E27FC236}">
-                <a16:creationId xmlns:a16="http://schemas.microsoft.com/office/drawing/2014/main" id="{01208E75-2231-B742-A6C7-6852347C8D4B}"/>
-              </a:ext>
-            </a:extLst>
-          </p:cNvPr>
-          <p:cNvSpPr txBox="1"/>
-          <p:nvPr/>
-        </p:nvSpPr>
-        <p:spPr>
-          <a:xfrm>
-            <a:off x="984152" y="332934"/>
-            <a:ext cx="10210800" cy="505267"/>
-          </a:xfrm>
-          <a:prstGeom prst="rect">
-            <a:avLst/>
-          </a:prstGeom>
-        </p:spPr>
-        <p:txBody>
-          <a:bodyPr vert="horz" wrap="square" lIns="0" tIns="12700" rIns="0" bIns="0" rtlCol="0">
-            <a:spAutoFit/>
-          </a:bodyPr>
-          <a:lstStyle/>
-          <a:p>
-            <a:pPr marL="12700">
-              <a:spcBef>
-                <a:spcPts val="100"/>
-              </a:spcBef>
-            </a:pPr>
-            <a:r>
-              <a:rPr lang="fr-FR" sz="3200" dirty="0">
-                <a:cs typeface="Trebuchet MS"/>
-              </a:rPr>
-              <a:t>Strings</a:t>
-            </a:r>
-            <a:endParaRPr lang="en-US" sz="3200" dirty="0">
-              <a:cs typeface="Trebuchet MS"/>
-            </a:endParaRPr>
-          </a:p>
-        </p:txBody>
-      </p:sp>
-    </p:spTree>
-    <p:extLst>
-      <p:ext uri="{BB962C8B-B14F-4D97-AF65-F5344CB8AC3E}">
-        <p14:creationId xmlns:p14="http://schemas.microsoft.com/office/powerpoint/2010/main" val="3567495895"/>
-      </p:ext>
-    </p:extLst>
-  </p:cSld>
-  <p:clrMapOvr>
-    <a:masterClrMapping/>
-  </p:clrMapOvr>
-</p:sld>
-</file>
-
-<file path=ppt/slides/slide22.xml><?xml version="1.0" encoding="utf-8"?>
-<p:sld xmlns:a="http://schemas.openxmlformats.org/drawingml/2006/main" xmlns:r="http://schemas.openxmlformats.org/officeDocument/2006/relationships" xmlns:p="http://schemas.openxmlformats.org/presentationml/2006/main">
-  <p:cSld>
-    <p:spTree>
-      <p:nvGrpSpPr>
-        <p:cNvPr id="1" name=""/>
-        <p:cNvGrpSpPr/>
-        <p:nvPr/>
-      </p:nvGrpSpPr>
-      <p:grpSpPr>
-        <a:xfrm>
-          <a:off x="0" y="0"/>
-          <a:ext cx="0" cy="0"/>
-          <a:chOff x="0" y="0"/>
-          <a:chExt cx="0" cy="0"/>
-        </a:xfrm>
-      </p:grpSpPr>
-      <p:pic>
-        <p:nvPicPr>
-          <p:cNvPr id="5" name="תמונה 4">
-            <a:extLst>
-              <a:ext uri="{FF2B5EF4-FFF2-40B4-BE49-F238E27FC236}">
-                <a16:creationId xmlns:a16="http://schemas.microsoft.com/office/drawing/2014/main" id="{BBC00084-1578-4B20-A6E0-90AB55EA8A49}"/>
-              </a:ext>
-            </a:extLst>
-          </p:cNvPr>
-          <p:cNvPicPr>
-            <a:picLocks noChangeAspect="1"/>
-          </p:cNvPicPr>
-          <p:nvPr/>
-        </p:nvPicPr>
-        <p:blipFill>
-          <a:blip r:embed="rId2"/>
-          <a:stretch>
-            <a:fillRect/>
-          </a:stretch>
-        </p:blipFill>
-        <p:spPr>
-          <a:xfrm>
             <a:off x="3447741" y="332934"/>
             <a:ext cx="7747212" cy="6323444"/>
           </a:xfrm>
@@ -8676,7 +8486,7 @@
 </p:sld>
 </file>
 
-<file path=ppt/slides/slide23.xml><?xml version="1.0" encoding="utf-8"?>
+<file path=ppt/slides/slide22.xml><?xml version="1.0" encoding="utf-8"?>
 <p:sld xmlns:a="http://schemas.openxmlformats.org/drawingml/2006/main" xmlns:r="http://schemas.openxmlformats.org/officeDocument/2006/relationships" xmlns:p="http://schemas.openxmlformats.org/presentationml/2006/main">
   <p:cSld>
     <p:spTree>
@@ -8780,7 +8590,7 @@
 </p:sld>
 </file>
 
-<file path=ppt/slides/slide24.xml><?xml version="1.0" encoding="utf-8"?>
+<file path=ppt/slides/slide23.xml><?xml version="1.0" encoding="utf-8"?>
 <p:sld xmlns:a="http://schemas.openxmlformats.org/drawingml/2006/main" xmlns:r="http://schemas.openxmlformats.org/officeDocument/2006/relationships" xmlns:p="http://schemas.openxmlformats.org/presentationml/2006/main">
   <p:cSld>
     <p:spTree>
@@ -9070,6 +8880,165 @@
     <p:extLst>
       <p:ext uri="{BB962C8B-B14F-4D97-AF65-F5344CB8AC3E}">
         <p14:creationId xmlns:p14="http://schemas.microsoft.com/office/powerpoint/2010/main" val="1812335572"/>
+      </p:ext>
+    </p:extLst>
+  </p:cSld>
+  <p:clrMapOvr>
+    <a:masterClrMapping/>
+  </p:clrMapOvr>
+</p:sld>
+</file>
+
+<file path=ppt/slides/slide24.xml><?xml version="1.0" encoding="utf-8"?>
+<p:sld xmlns:a="http://schemas.openxmlformats.org/drawingml/2006/main" xmlns:r="http://schemas.openxmlformats.org/officeDocument/2006/relationships" xmlns:p="http://schemas.openxmlformats.org/presentationml/2006/main">
+  <p:cSld>
+    <p:spTree>
+      <p:nvGrpSpPr>
+        <p:cNvPr id="1" name=""/>
+        <p:cNvGrpSpPr/>
+        <p:nvPr/>
+      </p:nvGrpSpPr>
+      <p:grpSpPr>
+        <a:xfrm>
+          <a:off x="0" y="0"/>
+          <a:ext cx="0" cy="0"/>
+          <a:chOff x="0" y="0"/>
+          <a:chExt cx="0" cy="0"/>
+        </a:xfrm>
+      </p:grpSpPr>
+      <p:sp>
+        <p:nvSpPr>
+          <p:cNvPr id="2" name="object 2"/>
+          <p:cNvSpPr txBox="1"/>
+          <p:nvPr/>
+        </p:nvSpPr>
+        <p:spPr>
+          <a:xfrm>
+            <a:off x="646987" y="223369"/>
+            <a:ext cx="10210800" cy="505267"/>
+          </a:xfrm>
+          <a:prstGeom prst="rect">
+            <a:avLst/>
+          </a:prstGeom>
+        </p:spPr>
+        <p:txBody>
+          <a:bodyPr vert="horz" wrap="square" lIns="0" tIns="12700" rIns="0" bIns="0" rtlCol="0">
+            <a:spAutoFit/>
+          </a:bodyPr>
+          <a:lstStyle/>
+          <a:p>
+            <a:pPr marL="12700">
+              <a:spcBef>
+                <a:spcPts val="100"/>
+              </a:spcBef>
+            </a:pPr>
+            <a:r>
+              <a:rPr lang="fr-FR" sz="3200" dirty="0">
+                <a:latin typeface="+mj-lt"/>
+                <a:cs typeface="Trebuchet MS"/>
+              </a:rPr>
+              <a:t>Python </a:t>
+            </a:r>
+            <a:r>
+              <a:rPr lang="fr-FR" sz="3200" dirty="0" err="1">
+                <a:latin typeface="+mj-lt"/>
+                <a:cs typeface="Trebuchet MS"/>
+              </a:rPr>
+              <a:t>Operators</a:t>
+            </a:r>
+            <a:endParaRPr lang="fr-FR" sz="3200" dirty="0">
+              <a:latin typeface="+mj-lt"/>
+              <a:cs typeface="Trebuchet MS"/>
+            </a:endParaRPr>
+          </a:p>
+        </p:txBody>
+      </p:sp>
+      <p:sp>
+        <p:nvSpPr>
+          <p:cNvPr id="5" name="object 3">
+            <a:extLst>
+              <a:ext uri="{FF2B5EF4-FFF2-40B4-BE49-F238E27FC236}">
+                <a16:creationId xmlns:a16="http://schemas.microsoft.com/office/drawing/2014/main" id="{4F4DD636-564F-4D0C-A86C-B31E81DB0186}"/>
+              </a:ext>
+            </a:extLst>
+          </p:cNvPr>
+          <p:cNvSpPr txBox="1"/>
+          <p:nvPr/>
+        </p:nvSpPr>
+        <p:spPr>
+          <a:xfrm>
+            <a:off x="657621" y="1184319"/>
+            <a:ext cx="8561705" cy="1120820"/>
+          </a:xfrm>
+          <a:prstGeom prst="rect">
+            <a:avLst/>
+          </a:prstGeom>
+        </p:spPr>
+        <p:txBody>
+          <a:bodyPr vert="horz" wrap="square" lIns="0" tIns="12700" rIns="0" bIns="0" rtlCol="0">
+            <a:spAutoFit/>
+          </a:bodyPr>
+          <a:lstStyle/>
+          <a:p>
+            <a:pPr algn="l" fontAlgn="base"/>
+            <a:r>
+              <a:rPr lang="en-US" dirty="0"/>
+              <a:t>Python Operators</a:t>
+            </a:r>
+          </a:p>
+          <a:p>
+            <a:pPr algn="l" fontAlgn="base"/>
+            <a:r>
+              <a:rPr lang="en-US" dirty="0"/>
+              <a:t>Operators are used to perform operations on variables and values.</a:t>
+            </a:r>
+          </a:p>
+          <a:p>
+            <a:pPr algn="l" fontAlgn="base"/>
+            <a:endParaRPr lang="en-US" dirty="0"/>
+          </a:p>
+          <a:p>
+            <a:pPr algn="l" fontAlgn="base"/>
+            <a:r>
+              <a:rPr lang="en-US" dirty="0"/>
+              <a:t>In the example below, we use the + operator to add together two values:</a:t>
+            </a:r>
+          </a:p>
+        </p:txBody>
+      </p:sp>
+      <p:pic>
+        <p:nvPicPr>
+          <p:cNvPr id="4" name="תמונה 3">
+            <a:extLst>
+              <a:ext uri="{FF2B5EF4-FFF2-40B4-BE49-F238E27FC236}">
+                <a16:creationId xmlns:a16="http://schemas.microsoft.com/office/drawing/2014/main" id="{4BBF72DB-EC98-4B73-81FA-E88B160FE3A2}"/>
+              </a:ext>
+            </a:extLst>
+          </p:cNvPr>
+          <p:cNvPicPr>
+            <a:picLocks noChangeAspect="1"/>
+          </p:cNvPicPr>
+          <p:nvPr/>
+        </p:nvPicPr>
+        <p:blipFill rotWithShape="1">
+          <a:blip r:embed="rId2"/>
+          <a:srcRect r="13901"/>
+          <a:stretch/>
+        </p:blipFill>
+        <p:spPr>
+          <a:xfrm>
+            <a:off x="646987" y="2742248"/>
+            <a:ext cx="9893620" cy="3621228"/>
+          </a:xfrm>
+          <a:prstGeom prst="rect">
+            <a:avLst/>
+          </a:prstGeom>
+        </p:spPr>
+      </p:pic>
+    </p:spTree>
+    <p:extLst>
+      <p:ext uri="{BB962C8B-B14F-4D97-AF65-F5344CB8AC3E}">
+        <p14:creationId xmlns:p14="http://schemas.microsoft.com/office/powerpoint/2010/main" val="510072616"/>
       </p:ext>
     </p:extLst>
   </p:cSld>
@@ -9104,165 +9073,6 @@
         </p:nvSpPr>
         <p:spPr>
           <a:xfrm>
-            <a:off x="646987" y="223369"/>
-            <a:ext cx="10210800" cy="505267"/>
-          </a:xfrm>
-          <a:prstGeom prst="rect">
-            <a:avLst/>
-          </a:prstGeom>
-        </p:spPr>
-        <p:txBody>
-          <a:bodyPr vert="horz" wrap="square" lIns="0" tIns="12700" rIns="0" bIns="0" rtlCol="0">
-            <a:spAutoFit/>
-          </a:bodyPr>
-          <a:lstStyle/>
-          <a:p>
-            <a:pPr marL="12700">
-              <a:spcBef>
-                <a:spcPts val="100"/>
-              </a:spcBef>
-            </a:pPr>
-            <a:r>
-              <a:rPr lang="fr-FR" sz="3200" dirty="0">
-                <a:latin typeface="+mj-lt"/>
-                <a:cs typeface="Trebuchet MS"/>
-              </a:rPr>
-              <a:t>Python </a:t>
-            </a:r>
-            <a:r>
-              <a:rPr lang="fr-FR" sz="3200" dirty="0" err="1">
-                <a:latin typeface="+mj-lt"/>
-                <a:cs typeface="Trebuchet MS"/>
-              </a:rPr>
-              <a:t>Operators</a:t>
-            </a:r>
-            <a:endParaRPr lang="fr-FR" sz="3200" dirty="0">
-              <a:latin typeface="+mj-lt"/>
-              <a:cs typeface="Trebuchet MS"/>
-            </a:endParaRPr>
-          </a:p>
-        </p:txBody>
-      </p:sp>
-      <p:sp>
-        <p:nvSpPr>
-          <p:cNvPr id="5" name="object 3">
-            <a:extLst>
-              <a:ext uri="{FF2B5EF4-FFF2-40B4-BE49-F238E27FC236}">
-                <a16:creationId xmlns:a16="http://schemas.microsoft.com/office/drawing/2014/main" id="{4F4DD636-564F-4D0C-A86C-B31E81DB0186}"/>
-              </a:ext>
-            </a:extLst>
-          </p:cNvPr>
-          <p:cNvSpPr txBox="1"/>
-          <p:nvPr/>
-        </p:nvSpPr>
-        <p:spPr>
-          <a:xfrm>
-            <a:off x="657621" y="1184319"/>
-            <a:ext cx="8561705" cy="1120820"/>
-          </a:xfrm>
-          <a:prstGeom prst="rect">
-            <a:avLst/>
-          </a:prstGeom>
-        </p:spPr>
-        <p:txBody>
-          <a:bodyPr vert="horz" wrap="square" lIns="0" tIns="12700" rIns="0" bIns="0" rtlCol="0">
-            <a:spAutoFit/>
-          </a:bodyPr>
-          <a:lstStyle/>
-          <a:p>
-            <a:pPr algn="l" fontAlgn="base"/>
-            <a:r>
-              <a:rPr lang="en-US" dirty="0"/>
-              <a:t>Python Operators</a:t>
-            </a:r>
-          </a:p>
-          <a:p>
-            <a:pPr algn="l" fontAlgn="base"/>
-            <a:r>
-              <a:rPr lang="en-US" dirty="0"/>
-              <a:t>Operators are used to perform operations on variables and values.</a:t>
-            </a:r>
-          </a:p>
-          <a:p>
-            <a:pPr algn="l" fontAlgn="base"/>
-            <a:endParaRPr lang="en-US" dirty="0"/>
-          </a:p>
-          <a:p>
-            <a:pPr algn="l" fontAlgn="base"/>
-            <a:r>
-              <a:rPr lang="en-US" dirty="0"/>
-              <a:t>In the example below, we use the + operator to add together two values:</a:t>
-            </a:r>
-          </a:p>
-        </p:txBody>
-      </p:sp>
-      <p:pic>
-        <p:nvPicPr>
-          <p:cNvPr id="4" name="תמונה 3">
-            <a:extLst>
-              <a:ext uri="{FF2B5EF4-FFF2-40B4-BE49-F238E27FC236}">
-                <a16:creationId xmlns:a16="http://schemas.microsoft.com/office/drawing/2014/main" id="{4BBF72DB-EC98-4B73-81FA-E88B160FE3A2}"/>
-              </a:ext>
-            </a:extLst>
-          </p:cNvPr>
-          <p:cNvPicPr>
-            <a:picLocks noChangeAspect="1"/>
-          </p:cNvPicPr>
-          <p:nvPr/>
-        </p:nvPicPr>
-        <p:blipFill rotWithShape="1">
-          <a:blip r:embed="rId2"/>
-          <a:srcRect r="13901"/>
-          <a:stretch/>
-        </p:blipFill>
-        <p:spPr>
-          <a:xfrm>
-            <a:off x="646987" y="2742248"/>
-            <a:ext cx="9893620" cy="3621228"/>
-          </a:xfrm>
-          <a:prstGeom prst="rect">
-            <a:avLst/>
-          </a:prstGeom>
-        </p:spPr>
-      </p:pic>
-    </p:spTree>
-    <p:extLst>
-      <p:ext uri="{BB962C8B-B14F-4D97-AF65-F5344CB8AC3E}">
-        <p14:creationId xmlns:p14="http://schemas.microsoft.com/office/powerpoint/2010/main" val="510072616"/>
-      </p:ext>
-    </p:extLst>
-  </p:cSld>
-  <p:clrMapOvr>
-    <a:masterClrMapping/>
-  </p:clrMapOvr>
-</p:sld>
-</file>
-
-<file path=ppt/slides/slide26.xml><?xml version="1.0" encoding="utf-8"?>
-<p:sld xmlns:a="http://schemas.openxmlformats.org/drawingml/2006/main" xmlns:r="http://schemas.openxmlformats.org/officeDocument/2006/relationships" xmlns:p="http://schemas.openxmlformats.org/presentationml/2006/main">
-  <p:cSld>
-    <p:spTree>
-      <p:nvGrpSpPr>
-        <p:cNvPr id="1" name=""/>
-        <p:cNvGrpSpPr/>
-        <p:nvPr/>
-      </p:nvGrpSpPr>
-      <p:grpSpPr>
-        <a:xfrm>
-          <a:off x="0" y="0"/>
-          <a:ext cx="0" cy="0"/>
-          <a:chOff x="0" y="0"/>
-          <a:chExt cx="0" cy="0"/>
-        </a:xfrm>
-      </p:grpSpPr>
-      <p:sp>
-        <p:nvSpPr>
-          <p:cNvPr id="2" name="object 2"/>
-          <p:cNvSpPr txBox="1"/>
-          <p:nvPr/>
-        </p:nvSpPr>
-        <p:spPr>
-          <a:xfrm>
             <a:off x="771920" y="417679"/>
             <a:ext cx="10210800" cy="505267"/>
           </a:xfrm>
@@ -9344,7 +9154,7 @@
 </p:sld>
 </file>
 
-<file path=ppt/slides/slide27.xml><?xml version="1.0" encoding="utf-8"?>
+<file path=ppt/slides/slide26.xml><?xml version="1.0" encoding="utf-8"?>
 <p:sld xmlns:a="http://schemas.openxmlformats.org/drawingml/2006/main" xmlns:r="http://schemas.openxmlformats.org/officeDocument/2006/relationships" xmlns:p="http://schemas.openxmlformats.org/presentationml/2006/main">
   <p:cSld>
     <p:spTree>
@@ -9601,7 +9411,7 @@
 </p:sld>
 </file>
 
-<file path=ppt/slides/slide28.xml><?xml version="1.0" encoding="utf-8"?>
+<file path=ppt/slides/slide27.xml><?xml version="1.0" encoding="utf-8"?>
 <p:sld xmlns:a="http://schemas.openxmlformats.org/drawingml/2006/main" xmlns:r="http://schemas.openxmlformats.org/officeDocument/2006/relationships" xmlns:p="http://schemas.openxmlformats.org/presentationml/2006/main">
   <p:cSld>
     <p:spTree>
@@ -9756,7 +9566,7 @@
           <p:cNvPr id="4" name="object 2">
             <a:extLst>
               <a:ext uri="{FF2B5EF4-FFF2-40B4-BE49-F238E27FC236}">
-                <a16:creationId xmlns:a16="http://schemas.microsoft.com/office/drawing/2014/main" id="{1A6C1642-1A5D-9546-8C71-E1FD791820CD}"/>
+                <a16:creationId xmlns:a16="http://schemas.microsoft.com/office/drawing/2014/main" id="{C13A9BBC-0087-804F-92F8-1053FBE6928B}"/>
               </a:ext>
             </a:extLst>
           </p:cNvPr>
@@ -9765,7 +9575,7 @@
         </p:nvSpPr>
         <p:spPr>
           <a:xfrm>
-            <a:off x="493701" y="332602"/>
+            <a:off x="895351" y="202803"/>
             <a:ext cx="10210800" cy="505267"/>
           </a:xfrm>
           <a:prstGeom prst="rect">
@@ -9788,7 +9598,7 @@
                 <a:latin typeface="+mj-lt"/>
                 <a:cs typeface="Trebuchet MS"/>
               </a:rPr>
-              <a:t>Python syntax basics</a:t>
+              <a:t>Python Comments</a:t>
             </a:r>
           </a:p>
         </p:txBody>
@@ -9798,7 +9608,7 @@
           <p:cNvPr id="5" name="object 3">
             <a:extLst>
               <a:ext uri="{FF2B5EF4-FFF2-40B4-BE49-F238E27FC236}">
-                <a16:creationId xmlns:a16="http://schemas.microsoft.com/office/drawing/2014/main" id="{195F30B8-B7D5-A749-AF65-1D9743E5C94C}"/>
+                <a16:creationId xmlns:a16="http://schemas.microsoft.com/office/drawing/2014/main" id="{DC63A9C4-5B5C-5C48-A3FC-6D64E7224EEE}"/>
               </a:ext>
             </a:extLst>
           </p:cNvPr>
@@ -9807,8 +9617,8 @@
         </p:nvSpPr>
         <p:spPr>
           <a:xfrm>
-            <a:off x="493702" y="1821227"/>
-            <a:ext cx="5940351" cy="566822"/>
+            <a:off x="895349" y="1233285"/>
+            <a:ext cx="4969587" cy="1674817"/>
           </a:xfrm>
           <a:prstGeom prst="rect">
             <a:avLst/>
@@ -9823,17 +9633,31 @@
             <a:pPr algn="l" fontAlgn="base"/>
             <a:r>
               <a:rPr lang="en-US" dirty="0"/>
-              <a:t>In Python, variables are created when you assign a value to it</a:t>
+              <a:t>Comments can be used to explain Python code.</a:t>
+            </a:r>
+          </a:p>
+          <a:p>
+            <a:pPr algn="l" fontAlgn="base"/>
+            <a:r>
+              <a:rPr lang="en-US" dirty="0"/>
+              <a:t>Comments can be used to make the code more readable.</a:t>
+            </a:r>
+          </a:p>
+          <a:p>
+            <a:pPr algn="l" fontAlgn="base"/>
+            <a:r>
+              <a:rPr lang="en-US" dirty="0"/>
+              <a:t>Comments can be used to prevent execution when testing code.</a:t>
             </a:r>
           </a:p>
         </p:txBody>
       </p:sp>
       <p:pic>
         <p:nvPicPr>
-          <p:cNvPr id="6" name="תמונה 7">
+          <p:cNvPr id="6" name="תמונה 3">
             <a:extLst>
               <a:ext uri="{FF2B5EF4-FFF2-40B4-BE49-F238E27FC236}">
-                <a16:creationId xmlns:a16="http://schemas.microsoft.com/office/drawing/2014/main" id="{CA88EE62-557E-ED4C-AF86-23F55224CA83}"/>
+                <a16:creationId xmlns:a16="http://schemas.microsoft.com/office/drawing/2014/main" id="{27FCBBEC-F17E-6942-BEBA-E103A692E1DE}"/>
               </a:ext>
             </a:extLst>
           </p:cNvPr>
@@ -9850,8 +9674,8 @@
         </p:blipFill>
         <p:spPr>
           <a:xfrm>
-            <a:off x="6617007" y="987457"/>
-            <a:ext cx="4876800" cy="2124075"/>
+            <a:off x="6861686" y="423977"/>
+            <a:ext cx="4676775" cy="2105025"/>
           </a:xfrm>
           <a:prstGeom prst="rect">
             <a:avLst/>
@@ -9860,10 +9684,10 @@
       </p:pic>
       <p:pic>
         <p:nvPicPr>
-          <p:cNvPr id="7" name="תמונה 9">
+          <p:cNvPr id="7" name="תמונה 6">
             <a:extLst>
               <a:ext uri="{FF2B5EF4-FFF2-40B4-BE49-F238E27FC236}">
-                <a16:creationId xmlns:a16="http://schemas.microsoft.com/office/drawing/2014/main" id="{ADBF1FF7-82E0-6647-B755-0DA7E76831B9}"/>
+                <a16:creationId xmlns:a16="http://schemas.microsoft.com/office/drawing/2014/main" id="{313DAD7B-33D1-394E-B4E5-E5BFC755891B}"/>
               </a:ext>
             </a:extLst>
           </p:cNvPr>
@@ -9880,8 +9704,38 @@
         </p:blipFill>
         <p:spPr>
           <a:xfrm>
-            <a:off x="2377746" y="3552613"/>
-            <a:ext cx="6076951" cy="2724151"/>
+            <a:off x="5175759" y="2666551"/>
+            <a:ext cx="6362700" cy="1533525"/>
+          </a:xfrm>
+          <a:prstGeom prst="rect">
+            <a:avLst/>
+          </a:prstGeom>
+        </p:spPr>
+      </p:pic>
+      <p:pic>
+        <p:nvPicPr>
+          <p:cNvPr id="8" name="תמונה 10">
+            <a:extLst>
+              <a:ext uri="{FF2B5EF4-FFF2-40B4-BE49-F238E27FC236}">
+                <a16:creationId xmlns:a16="http://schemas.microsoft.com/office/drawing/2014/main" id="{AB8E95E8-32C9-9640-9337-E6432F322261}"/>
+              </a:ext>
+            </a:extLst>
+          </p:cNvPr>
+          <p:cNvPicPr>
+            <a:picLocks noChangeAspect="1"/>
+          </p:cNvPicPr>
+          <p:nvPr/>
+        </p:nvPicPr>
+        <p:blipFill>
+          <a:blip r:embed="rId4"/>
+          <a:stretch>
+            <a:fillRect/>
+          </a:stretch>
+        </p:blipFill>
+        <p:spPr>
+          <a:xfrm>
+            <a:off x="3413636" y="4529782"/>
+            <a:ext cx="8124825" cy="1628775"/>
           </a:xfrm>
           <a:prstGeom prst="rect">
             <a:avLst/>
@@ -9891,7 +9745,7 @@
     </p:spTree>
     <p:extLst>
       <p:ext uri="{BB962C8B-B14F-4D97-AF65-F5344CB8AC3E}">
-        <p14:creationId xmlns:p14="http://schemas.microsoft.com/office/powerpoint/2010/main" val="1955537094"/>
+        <p14:creationId xmlns:p14="http://schemas.microsoft.com/office/powerpoint/2010/main" val="2765784715"/>
       </p:ext>
     </p:extLst>
   </p:cSld>
@@ -9923,7 +9777,7 @@
           <p:cNvPr id="4" name="object 2">
             <a:extLst>
               <a:ext uri="{FF2B5EF4-FFF2-40B4-BE49-F238E27FC236}">
-                <a16:creationId xmlns:a16="http://schemas.microsoft.com/office/drawing/2014/main" id="{C13A9BBC-0087-804F-92F8-1053FBE6928B}"/>
+                <a16:creationId xmlns:a16="http://schemas.microsoft.com/office/drawing/2014/main" id="{74C3611D-9C9A-6448-96CE-57D1F185E5C6}"/>
               </a:ext>
             </a:extLst>
           </p:cNvPr>
@@ -9932,7 +9786,7 @@
         </p:nvSpPr>
         <p:spPr>
           <a:xfrm>
-            <a:off x="895351" y="202803"/>
+            <a:off x="1170305" y="356967"/>
             <a:ext cx="10210800" cy="505267"/>
           </a:xfrm>
           <a:prstGeom prst="rect">
@@ -9955,7 +9809,7 @@
                 <a:latin typeface="+mj-lt"/>
                 <a:cs typeface="Trebuchet MS"/>
               </a:rPr>
-              <a:t>Python Comments</a:t>
+              <a:t>Multi Line Comments</a:t>
             </a:r>
           </a:p>
         </p:txBody>
@@ -9965,7 +9819,7 @@
           <p:cNvPr id="5" name="object 3">
             <a:extLst>
               <a:ext uri="{FF2B5EF4-FFF2-40B4-BE49-F238E27FC236}">
-                <a16:creationId xmlns:a16="http://schemas.microsoft.com/office/drawing/2014/main" id="{DC63A9C4-5B5C-5C48-A3FC-6D64E7224EEE}"/>
+                <a16:creationId xmlns:a16="http://schemas.microsoft.com/office/drawing/2014/main" id="{D6D36BE5-B017-E74C-8121-708692336DD8}"/>
               </a:ext>
             </a:extLst>
           </p:cNvPr>
@@ -9974,8 +9828,8 @@
         </p:nvSpPr>
         <p:spPr>
           <a:xfrm>
-            <a:off x="895349" y="1233285"/>
-            <a:ext cx="4969587" cy="1674817"/>
+            <a:off x="1415098" y="1235294"/>
+            <a:ext cx="8561705" cy="474489"/>
           </a:xfrm>
           <a:prstGeom prst="rect">
             <a:avLst/>
@@ -9989,32 +9843,27 @@
           <a:p>
             <a:pPr algn="l" fontAlgn="base"/>
             <a:r>
-              <a:rPr lang="en-US" dirty="0"/>
-              <a:t>Comments can be used to explain Python code.</a:t>
+              <a:rPr lang="en-US" sz="1600" dirty="0"/>
+              <a:t>First way for a Multi Line Comments</a:t>
             </a:r>
           </a:p>
           <a:p>
             <a:pPr algn="l" fontAlgn="base"/>
             <a:r>
-              <a:rPr lang="en-US" dirty="0"/>
-              <a:t>Comments can be used to make the code more readable.</a:t>
-            </a:r>
-          </a:p>
-          <a:p>
-            <a:pPr algn="l" fontAlgn="base"/>
-            <a:r>
-              <a:rPr lang="en-US" dirty="0"/>
-              <a:t>Comments can be used to prevent execution when testing code.</a:t>
+              <a:rPr lang="en-US" sz="1400" b="1" dirty="0">
+                <a:latin typeface="var(--font-din)"/>
+              </a:rPr>
+              <a:t>  </a:t>
             </a:r>
           </a:p>
         </p:txBody>
       </p:sp>
       <p:pic>
         <p:nvPicPr>
-          <p:cNvPr id="6" name="תמונה 3">
+          <p:cNvPr id="6" name="תמונה 4">
             <a:extLst>
               <a:ext uri="{FF2B5EF4-FFF2-40B4-BE49-F238E27FC236}">
-                <a16:creationId xmlns:a16="http://schemas.microsoft.com/office/drawing/2014/main" id="{27FCBBEC-F17E-6942-BEBA-E103A692E1DE}"/>
+                <a16:creationId xmlns:a16="http://schemas.microsoft.com/office/drawing/2014/main" id="{258D8360-1A66-6D49-85E2-841A4942194B}"/>
               </a:ext>
             </a:extLst>
           </p:cNvPr>
@@ -10031,20 +9880,62 @@
         </p:blipFill>
         <p:spPr>
           <a:xfrm>
-            <a:off x="6861686" y="423977"/>
-            <a:ext cx="4676775" cy="2105025"/>
+            <a:off x="1415098" y="1625377"/>
+            <a:ext cx="5753100" cy="1628775"/>
           </a:xfrm>
           <a:prstGeom prst="rect">
             <a:avLst/>
           </a:prstGeom>
         </p:spPr>
       </p:pic>
+      <p:sp>
+        <p:nvSpPr>
+          <p:cNvPr id="7" name="object 3">
+            <a:extLst>
+              <a:ext uri="{FF2B5EF4-FFF2-40B4-BE49-F238E27FC236}">
+                <a16:creationId xmlns:a16="http://schemas.microsoft.com/office/drawing/2014/main" id="{FF472F4C-2890-1141-995F-91710C19B17E}"/>
+              </a:ext>
+            </a:extLst>
+          </p:cNvPr>
+          <p:cNvSpPr txBox="1"/>
+          <p:nvPr/>
+        </p:nvSpPr>
+        <p:spPr>
+          <a:xfrm>
+            <a:off x="1415098" y="4017294"/>
+            <a:ext cx="8561705" cy="505267"/>
+          </a:xfrm>
+          <a:prstGeom prst="rect">
+            <a:avLst/>
+          </a:prstGeom>
+        </p:spPr>
+        <p:txBody>
+          <a:bodyPr vert="horz" wrap="square" lIns="0" tIns="12700" rIns="0" bIns="0" rtlCol="0">
+            <a:spAutoFit/>
+          </a:bodyPr>
+          <a:lstStyle/>
+          <a:p>
+            <a:pPr algn="l" fontAlgn="base"/>
+            <a:r>
+              <a:rPr lang="en-US" sz="1600" dirty="0"/>
+              <a:t>Second way for a Multi Line Comments</a:t>
+            </a:r>
+          </a:p>
+          <a:p>
+            <a:pPr algn="l" fontAlgn="base"/>
+            <a:r>
+              <a:rPr lang="en-US" sz="1600" dirty="0"/>
+              <a:t>  </a:t>
+            </a:r>
+          </a:p>
+        </p:txBody>
+      </p:sp>
       <p:pic>
         <p:nvPicPr>
-          <p:cNvPr id="7" name="תמונה 6">
+          <p:cNvPr id="8" name="תמונה 9">
             <a:extLst>
               <a:ext uri="{FF2B5EF4-FFF2-40B4-BE49-F238E27FC236}">
-                <a16:creationId xmlns:a16="http://schemas.microsoft.com/office/drawing/2014/main" id="{313DAD7B-33D1-394E-B4E5-E5BFC755891B}"/>
+                <a16:creationId xmlns:a16="http://schemas.microsoft.com/office/drawing/2014/main" id="{61D0707B-32A5-E34D-8051-E7A6046612BE}"/>
               </a:ext>
             </a:extLst>
           </p:cNvPr>
@@ -10061,38 +9952,8 @@
         </p:blipFill>
         <p:spPr>
           <a:xfrm>
-            <a:off x="5175759" y="2666551"/>
-            <a:ext cx="6362700" cy="1533525"/>
-          </a:xfrm>
-          <a:prstGeom prst="rect">
-            <a:avLst/>
-          </a:prstGeom>
-        </p:spPr>
-      </p:pic>
-      <p:pic>
-        <p:nvPicPr>
-          <p:cNvPr id="8" name="תמונה 10">
-            <a:extLst>
-              <a:ext uri="{FF2B5EF4-FFF2-40B4-BE49-F238E27FC236}">
-                <a16:creationId xmlns:a16="http://schemas.microsoft.com/office/drawing/2014/main" id="{AB8E95E8-32C9-9640-9337-E6432F322261}"/>
-              </a:ext>
-            </a:extLst>
-          </p:cNvPr>
-          <p:cNvPicPr>
-            <a:picLocks noChangeAspect="1"/>
-          </p:cNvPicPr>
-          <p:nvPr/>
-        </p:nvPicPr>
-        <p:blipFill>
-          <a:blip r:embed="rId4"/>
-          <a:stretch>
-            <a:fillRect/>
-          </a:stretch>
-        </p:blipFill>
-        <p:spPr>
-          <a:xfrm>
-            <a:off x="3413636" y="4529782"/>
-            <a:ext cx="8124825" cy="1628775"/>
+            <a:off x="1415097" y="4390354"/>
+            <a:ext cx="7381875" cy="1790700"/>
           </a:xfrm>
           <a:prstGeom prst="rect">
             <a:avLst/>
@@ -10102,7 +9963,7 @@
     </p:spTree>
     <p:extLst>
       <p:ext uri="{BB962C8B-B14F-4D97-AF65-F5344CB8AC3E}">
-        <p14:creationId xmlns:p14="http://schemas.microsoft.com/office/powerpoint/2010/main" val="2765784715"/>
+        <p14:creationId xmlns:p14="http://schemas.microsoft.com/office/powerpoint/2010/main" val="127015875"/>
       </p:ext>
     </p:extLst>
   </p:cSld>
@@ -10134,7 +9995,7 @@
           <p:cNvPr id="4" name="object 2">
             <a:extLst>
               <a:ext uri="{FF2B5EF4-FFF2-40B4-BE49-F238E27FC236}">
-                <a16:creationId xmlns:a16="http://schemas.microsoft.com/office/drawing/2014/main" id="{74C3611D-9C9A-6448-96CE-57D1F185E5C6}"/>
+                <a16:creationId xmlns:a16="http://schemas.microsoft.com/office/drawing/2014/main" id="{D420AC7C-5A1A-9742-A0D6-7E8CC5ADCF89}"/>
               </a:ext>
             </a:extLst>
           </p:cNvPr>
@@ -10143,7 +10004,7 @@
         </p:nvSpPr>
         <p:spPr>
           <a:xfrm>
-            <a:off x="1170305" y="356967"/>
+            <a:off x="959213" y="260099"/>
             <a:ext cx="10210800" cy="505267"/>
           </a:xfrm>
           <a:prstGeom prst="rect">
@@ -10166,7 +10027,7 @@
                 <a:latin typeface="+mj-lt"/>
                 <a:cs typeface="Trebuchet MS"/>
               </a:rPr>
-              <a:t>Multi Line Comments</a:t>
+              <a:t>Python Variables</a:t>
             </a:r>
           </a:p>
         </p:txBody>
@@ -10176,7 +10037,7 @@
           <p:cNvPr id="5" name="object 3">
             <a:extLst>
               <a:ext uri="{FF2B5EF4-FFF2-40B4-BE49-F238E27FC236}">
-                <a16:creationId xmlns:a16="http://schemas.microsoft.com/office/drawing/2014/main" id="{D6D36BE5-B017-E74C-8121-708692336DD8}"/>
+                <a16:creationId xmlns:a16="http://schemas.microsoft.com/office/drawing/2014/main" id="{B5F7BF32-8627-9A47-837A-8219E71DF761}"/>
               </a:ext>
             </a:extLst>
           </p:cNvPr>
@@ -10185,8 +10046,8 @@
         </p:nvSpPr>
         <p:spPr>
           <a:xfrm>
-            <a:off x="1415098" y="1235294"/>
-            <a:ext cx="8561705" cy="474489"/>
+            <a:off x="807185" y="1461622"/>
+            <a:ext cx="4976073" cy="1274708"/>
           </a:xfrm>
           <a:prstGeom prst="rect">
             <a:avLst/>
@@ -10201,26 +10062,35 @@
             <a:pPr algn="l" fontAlgn="base"/>
             <a:r>
               <a:rPr lang="en-US" sz="1600" dirty="0"/>
-              <a:t>First way for a Multi Line Comments</a:t>
+              <a:t>Creating Variables</a:t>
             </a:r>
           </a:p>
           <a:p>
             <a:pPr algn="l" fontAlgn="base"/>
             <a:r>
-              <a:rPr lang="en-US" sz="1400" b="1" dirty="0">
-                <a:latin typeface="var(--font-din)"/>
-              </a:rPr>
-              <a:t>  </a:t>
+              <a:rPr lang="en-US" sz="1600" dirty="0"/>
+              <a:t>Python has no command for declaring a variable.</a:t>
+            </a:r>
+          </a:p>
+          <a:p>
+            <a:pPr algn="l" fontAlgn="base"/>
+            <a:endParaRPr lang="en-US" dirty="0"/>
+          </a:p>
+          <a:p>
+            <a:pPr algn="l" fontAlgn="base"/>
+            <a:r>
+              <a:rPr lang="en-US" sz="1600" dirty="0"/>
+              <a:t>A variable is created the moment you first assign a value to it.</a:t>
             </a:r>
           </a:p>
         </p:txBody>
       </p:sp>
       <p:pic>
         <p:nvPicPr>
-          <p:cNvPr id="6" name="תמונה 4">
+          <p:cNvPr id="6" name="תמונה 3">
             <a:extLst>
               <a:ext uri="{FF2B5EF4-FFF2-40B4-BE49-F238E27FC236}">
-                <a16:creationId xmlns:a16="http://schemas.microsoft.com/office/drawing/2014/main" id="{258D8360-1A66-6D49-85E2-841A4942194B}"/>
+                <a16:creationId xmlns:a16="http://schemas.microsoft.com/office/drawing/2014/main" id="{6D8D7DB5-8E39-0A44-A9B7-7160F0AC3514}"/>
               </a:ext>
             </a:extLst>
           </p:cNvPr>
@@ -10237,62 +10107,20 @@
         </p:blipFill>
         <p:spPr>
           <a:xfrm>
-            <a:off x="1415098" y="1625377"/>
-            <a:ext cx="5753100" cy="1628775"/>
+            <a:off x="6252506" y="1164705"/>
+            <a:ext cx="5667375" cy="1571625"/>
           </a:xfrm>
           <a:prstGeom prst="rect">
             <a:avLst/>
           </a:prstGeom>
         </p:spPr>
       </p:pic>
-      <p:sp>
-        <p:nvSpPr>
-          <p:cNvPr id="7" name="object 3">
+      <p:pic>
+        <p:nvPicPr>
+          <p:cNvPr id="7" name="תמונה 7">
             <a:extLst>
               <a:ext uri="{FF2B5EF4-FFF2-40B4-BE49-F238E27FC236}">
-                <a16:creationId xmlns:a16="http://schemas.microsoft.com/office/drawing/2014/main" id="{FF472F4C-2890-1141-995F-91710C19B17E}"/>
-              </a:ext>
-            </a:extLst>
-          </p:cNvPr>
-          <p:cNvSpPr txBox="1"/>
-          <p:nvPr/>
-        </p:nvSpPr>
-        <p:spPr>
-          <a:xfrm>
-            <a:off x="1415098" y="4017294"/>
-            <a:ext cx="8561705" cy="505267"/>
-          </a:xfrm>
-          <a:prstGeom prst="rect">
-            <a:avLst/>
-          </a:prstGeom>
-        </p:spPr>
-        <p:txBody>
-          <a:bodyPr vert="horz" wrap="square" lIns="0" tIns="12700" rIns="0" bIns="0" rtlCol="0">
-            <a:spAutoFit/>
-          </a:bodyPr>
-          <a:lstStyle/>
-          <a:p>
-            <a:pPr algn="l" fontAlgn="base"/>
-            <a:r>
-              <a:rPr lang="en-US" sz="1600" dirty="0"/>
-              <a:t>Second way for a Multi Line Comments</a:t>
-            </a:r>
-          </a:p>
-          <a:p>
-            <a:pPr algn="l" fontAlgn="base"/>
-            <a:r>
-              <a:rPr lang="en-US" sz="1600" dirty="0"/>
-              <a:t>  </a:t>
-            </a:r>
-          </a:p>
-        </p:txBody>
-      </p:sp>
-      <p:pic>
-        <p:nvPicPr>
-          <p:cNvPr id="8" name="תמונה 9">
-            <a:extLst>
-              <a:ext uri="{FF2B5EF4-FFF2-40B4-BE49-F238E27FC236}">
-                <a16:creationId xmlns:a16="http://schemas.microsoft.com/office/drawing/2014/main" id="{61D0707B-32A5-E34D-8051-E7A6046612BE}"/>
+                <a16:creationId xmlns:a16="http://schemas.microsoft.com/office/drawing/2014/main" id="{7DC2D12F-ED02-AF4E-BBA8-3D16FF5956DB}"/>
               </a:ext>
             </a:extLst>
           </p:cNvPr>
@@ -10309,8 +10137,73 @@
         </p:blipFill>
         <p:spPr>
           <a:xfrm>
-            <a:off x="1415097" y="4390354"/>
-            <a:ext cx="7381875" cy="1790700"/>
+            <a:off x="6252506" y="2801564"/>
+            <a:ext cx="2638425" cy="533400"/>
+          </a:xfrm>
+          <a:prstGeom prst="rect">
+            <a:avLst/>
+          </a:prstGeom>
+        </p:spPr>
+      </p:pic>
+      <p:sp>
+        <p:nvSpPr>
+          <p:cNvPr id="8" name="object 3">
+            <a:extLst>
+              <a:ext uri="{FF2B5EF4-FFF2-40B4-BE49-F238E27FC236}">
+                <a16:creationId xmlns:a16="http://schemas.microsoft.com/office/drawing/2014/main" id="{D523C07A-4827-B743-9AD8-AB3C73DCF0C0}"/>
+              </a:ext>
+            </a:extLst>
+          </p:cNvPr>
+          <p:cNvSpPr txBox="1"/>
+          <p:nvPr/>
+        </p:nvSpPr>
+        <p:spPr>
+          <a:xfrm>
+            <a:off x="807183" y="4495714"/>
+            <a:ext cx="5128104" cy="751488"/>
+          </a:xfrm>
+          <a:prstGeom prst="rect">
+            <a:avLst/>
+          </a:prstGeom>
+        </p:spPr>
+        <p:txBody>
+          <a:bodyPr vert="horz" wrap="square" lIns="0" tIns="12700" rIns="0" bIns="0" rtlCol="0">
+            <a:spAutoFit/>
+          </a:bodyPr>
+          <a:lstStyle/>
+          <a:p>
+            <a:pPr algn="l" fontAlgn="base"/>
+            <a:r>
+              <a:rPr lang="en-US" sz="1600" dirty="0"/>
+              <a:t>Variables do not need to be declared with any particular type, and can even change type after they have been set.</a:t>
+            </a:r>
+          </a:p>
+        </p:txBody>
+      </p:sp>
+      <p:pic>
+        <p:nvPicPr>
+          <p:cNvPr id="9" name="תמונה 12">
+            <a:extLst>
+              <a:ext uri="{FF2B5EF4-FFF2-40B4-BE49-F238E27FC236}">
+                <a16:creationId xmlns:a16="http://schemas.microsoft.com/office/drawing/2014/main" id="{F70BEEBF-BEA1-A74D-A281-445AA422F524}"/>
+              </a:ext>
+            </a:extLst>
+          </p:cNvPr>
+          <p:cNvPicPr>
+            <a:picLocks noChangeAspect="1"/>
+          </p:cNvPicPr>
+          <p:nvPr/>
+        </p:nvPicPr>
+        <p:blipFill>
+          <a:blip r:embed="rId4"/>
+          <a:stretch>
+            <a:fillRect/>
+          </a:stretch>
+        </p:blipFill>
+        <p:spPr>
+          <a:xfrm>
+            <a:off x="6252505" y="4081540"/>
+            <a:ext cx="5649491" cy="1579835"/>
           </a:xfrm>
           <a:prstGeom prst="rect">
             <a:avLst/>
@@ -10320,7 +10213,7 @@
     </p:spTree>
     <p:extLst>
       <p:ext uri="{BB962C8B-B14F-4D97-AF65-F5344CB8AC3E}">
-        <p14:creationId xmlns:p14="http://schemas.microsoft.com/office/powerpoint/2010/main" val="127015875"/>
+        <p14:creationId xmlns:p14="http://schemas.microsoft.com/office/powerpoint/2010/main" val="594077989"/>
       </p:ext>
     </p:extLst>
   </p:cSld>
@@ -10352,7 +10245,7 @@
           <p:cNvPr id="4" name="object 2">
             <a:extLst>
               <a:ext uri="{FF2B5EF4-FFF2-40B4-BE49-F238E27FC236}">
-                <a16:creationId xmlns:a16="http://schemas.microsoft.com/office/drawing/2014/main" id="{D420AC7C-5A1A-9742-A0D6-7E8CC5ADCF89}"/>
+                <a16:creationId xmlns:a16="http://schemas.microsoft.com/office/drawing/2014/main" id="{04AF9D92-224C-B24F-9E72-1F5C68EA934A}"/>
               </a:ext>
             </a:extLst>
           </p:cNvPr>
@@ -10361,7 +10254,7 @@
         </p:nvSpPr>
         <p:spPr>
           <a:xfrm>
-            <a:off x="959213" y="260099"/>
+            <a:off x="1037685" y="332602"/>
             <a:ext cx="10210800" cy="505267"/>
           </a:xfrm>
           <a:prstGeom prst="rect">
@@ -10394,7 +10287,7 @@
           <p:cNvPr id="5" name="object 3">
             <a:extLst>
               <a:ext uri="{FF2B5EF4-FFF2-40B4-BE49-F238E27FC236}">
-                <a16:creationId xmlns:a16="http://schemas.microsoft.com/office/drawing/2014/main" id="{B5F7BF32-8627-9A47-837A-8219E71DF761}"/>
+                <a16:creationId xmlns:a16="http://schemas.microsoft.com/office/drawing/2014/main" id="{761ED89F-C38D-7F46-BB02-549F76E9E71A}"/>
               </a:ext>
             </a:extLst>
           </p:cNvPr>
@@ -10403,8 +10296,8 @@
         </p:nvSpPr>
         <p:spPr>
           <a:xfrm>
-            <a:off x="807185" y="1461622"/>
-            <a:ext cx="4976073" cy="1274708"/>
+            <a:off x="1037686" y="1289526"/>
+            <a:ext cx="8561705" cy="259045"/>
           </a:xfrm>
           <a:prstGeom prst="rect">
             <a:avLst/>
@@ -10418,36 +10311,20 @@
           <a:p>
             <a:pPr algn="l" fontAlgn="base"/>
             <a:r>
-              <a:rPr lang="en-US" sz="1600" dirty="0"/>
-              <a:t>Creating Variables</a:t>
-            </a:r>
-          </a:p>
-          <a:p>
-            <a:pPr algn="l" fontAlgn="base"/>
-            <a:r>
-              <a:rPr lang="en-US" sz="1600" dirty="0"/>
-              <a:t>Python has no command for declaring a variable.</a:t>
-            </a:r>
-          </a:p>
-          <a:p>
-            <a:pPr algn="l" fontAlgn="base"/>
-            <a:endParaRPr lang="en-US" dirty="0"/>
-          </a:p>
-          <a:p>
-            <a:pPr algn="l" fontAlgn="base"/>
-            <a:r>
-              <a:rPr lang="en-US" sz="1600" dirty="0"/>
-              <a:t>A variable is created the moment you first assign a value to it.</a:t>
+              <a:rPr lang="en-US" sz="1600" dirty="0">
+                <a:latin typeface="+mj-lt"/>
+              </a:rPr>
+              <a:t>If you want to specify the data type of a variable, this can be done with casting.</a:t>
             </a:r>
           </a:p>
         </p:txBody>
       </p:sp>
       <p:pic>
         <p:nvPicPr>
-          <p:cNvPr id="6" name="תמונה 3">
+          <p:cNvPr id="6" name="תמונה 8">
             <a:extLst>
               <a:ext uri="{FF2B5EF4-FFF2-40B4-BE49-F238E27FC236}">
-                <a16:creationId xmlns:a16="http://schemas.microsoft.com/office/drawing/2014/main" id="{6D8D7DB5-8E39-0A44-A9B7-7160F0AC3514}"/>
+                <a16:creationId xmlns:a16="http://schemas.microsoft.com/office/drawing/2014/main" id="{1101D368-777B-F44D-A87B-5210AB233101}"/>
               </a:ext>
             </a:extLst>
           </p:cNvPr>
@@ -10464,20 +10341,66 @@
         </p:blipFill>
         <p:spPr>
           <a:xfrm>
-            <a:off x="6252506" y="1164705"/>
-            <a:ext cx="5667375" cy="1571625"/>
+            <a:off x="1915219" y="1707523"/>
+            <a:ext cx="4380037" cy="1706663"/>
           </a:xfrm>
           <a:prstGeom prst="rect">
             <a:avLst/>
           </a:prstGeom>
         </p:spPr>
       </p:pic>
+      <p:sp>
+        <p:nvSpPr>
+          <p:cNvPr id="7" name="object 3">
+            <a:extLst>
+              <a:ext uri="{FF2B5EF4-FFF2-40B4-BE49-F238E27FC236}">
+                <a16:creationId xmlns:a16="http://schemas.microsoft.com/office/drawing/2014/main" id="{90CB057C-953F-9D40-8526-240FA1012B3E}"/>
+              </a:ext>
+            </a:extLst>
+          </p:cNvPr>
+          <p:cNvSpPr txBox="1"/>
+          <p:nvPr/>
+        </p:nvSpPr>
+        <p:spPr>
+          <a:xfrm>
+            <a:off x="1037686" y="3724275"/>
+            <a:ext cx="8561705" cy="505267"/>
+          </a:xfrm>
+          <a:prstGeom prst="rect">
+            <a:avLst/>
+          </a:prstGeom>
+        </p:spPr>
+        <p:txBody>
+          <a:bodyPr vert="horz" wrap="square" lIns="0" tIns="12700" rIns="0" bIns="0" rtlCol="0">
+            <a:spAutoFit/>
+          </a:bodyPr>
+          <a:lstStyle/>
+          <a:p>
+            <a:pPr algn="l" fontAlgn="base"/>
+            <a:r>
+              <a:rPr lang="en-US" sz="1600" dirty="0">
+                <a:latin typeface="+mj-lt"/>
+              </a:rPr>
+              <a:t>Get the Type</a:t>
+            </a:r>
+          </a:p>
+          <a:p>
+            <a:pPr algn="l" fontAlgn="base"/>
+            <a:r>
+              <a:rPr lang="en-US" sz="1600" dirty="0">
+                <a:latin typeface="+mj-lt"/>
+              </a:rPr>
+              <a:t>You can get the data type of a variable with the type() function.</a:t>
+            </a:r>
+          </a:p>
+        </p:txBody>
+      </p:sp>
       <p:pic>
         <p:nvPicPr>
-          <p:cNvPr id="7" name="תמונה 7">
+          <p:cNvPr id="8" name="תמונה 13">
             <a:extLst>
               <a:ext uri="{FF2B5EF4-FFF2-40B4-BE49-F238E27FC236}">
-                <a16:creationId xmlns:a16="http://schemas.microsoft.com/office/drawing/2014/main" id="{7DC2D12F-ED02-AF4E-BBA8-3D16FF5956DB}"/>
+                <a16:creationId xmlns:a16="http://schemas.microsoft.com/office/drawing/2014/main" id="{7C89871F-4574-A448-8C3A-07238294BEBC}"/>
               </a:ext>
             </a:extLst>
           </p:cNvPr>
@@ -10494,73 +10417,8 @@
         </p:blipFill>
         <p:spPr>
           <a:xfrm>
-            <a:off x="6252506" y="2801564"/>
-            <a:ext cx="2638425" cy="533400"/>
-          </a:xfrm>
-          <a:prstGeom prst="rect">
-            <a:avLst/>
-          </a:prstGeom>
-        </p:spPr>
-      </p:pic>
-      <p:sp>
-        <p:nvSpPr>
-          <p:cNvPr id="8" name="object 3">
-            <a:extLst>
-              <a:ext uri="{FF2B5EF4-FFF2-40B4-BE49-F238E27FC236}">
-                <a16:creationId xmlns:a16="http://schemas.microsoft.com/office/drawing/2014/main" id="{D523C07A-4827-B743-9AD8-AB3C73DCF0C0}"/>
-              </a:ext>
-            </a:extLst>
-          </p:cNvPr>
-          <p:cNvSpPr txBox="1"/>
-          <p:nvPr/>
-        </p:nvSpPr>
-        <p:spPr>
-          <a:xfrm>
-            <a:off x="807183" y="4495714"/>
-            <a:ext cx="5128104" cy="751488"/>
-          </a:xfrm>
-          <a:prstGeom prst="rect">
-            <a:avLst/>
-          </a:prstGeom>
-        </p:spPr>
-        <p:txBody>
-          <a:bodyPr vert="horz" wrap="square" lIns="0" tIns="12700" rIns="0" bIns="0" rtlCol="0">
-            <a:spAutoFit/>
-          </a:bodyPr>
-          <a:lstStyle/>
-          <a:p>
-            <a:pPr algn="l" fontAlgn="base"/>
-            <a:r>
-              <a:rPr lang="en-US" sz="1600" dirty="0"/>
-              <a:t>Variables do not need to be declared with any particular type, and can even change type after they have been set.</a:t>
-            </a:r>
-          </a:p>
-        </p:txBody>
-      </p:sp>
-      <p:pic>
-        <p:nvPicPr>
-          <p:cNvPr id="9" name="תמונה 12">
-            <a:extLst>
-              <a:ext uri="{FF2B5EF4-FFF2-40B4-BE49-F238E27FC236}">
-                <a16:creationId xmlns:a16="http://schemas.microsoft.com/office/drawing/2014/main" id="{F70BEEBF-BEA1-A74D-A281-445AA422F524}"/>
-              </a:ext>
-            </a:extLst>
-          </p:cNvPr>
-          <p:cNvPicPr>
-            <a:picLocks noChangeAspect="1"/>
-          </p:cNvPicPr>
-          <p:nvPr/>
-        </p:nvPicPr>
-        <p:blipFill>
-          <a:blip r:embed="rId4"/>
-          <a:stretch>
-            <a:fillRect/>
-          </a:stretch>
-        </p:blipFill>
-        <p:spPr>
-          <a:xfrm>
-            <a:off x="6252505" y="4081540"/>
-            <a:ext cx="5649491" cy="1579835"/>
+            <a:off x="1915219" y="4539634"/>
+            <a:ext cx="4430836" cy="1865615"/>
           </a:xfrm>
           <a:prstGeom prst="rect">
             <a:avLst/>
@@ -10570,7 +10428,7 @@
     </p:spTree>
     <p:extLst>
       <p:ext uri="{BB962C8B-B14F-4D97-AF65-F5344CB8AC3E}">
-        <p14:creationId xmlns:p14="http://schemas.microsoft.com/office/powerpoint/2010/main" val="594077989"/>
+        <p14:creationId xmlns:p14="http://schemas.microsoft.com/office/powerpoint/2010/main" val="436353858"/>
       </p:ext>
     </p:extLst>
   </p:cSld>
@@ -10602,7 +10460,7 @@
           <p:cNvPr id="4" name="object 2">
             <a:extLst>
               <a:ext uri="{FF2B5EF4-FFF2-40B4-BE49-F238E27FC236}">
-                <a16:creationId xmlns:a16="http://schemas.microsoft.com/office/drawing/2014/main" id="{04AF9D92-224C-B24F-9E72-1F5C68EA934A}"/>
+                <a16:creationId xmlns:a16="http://schemas.microsoft.com/office/drawing/2014/main" id="{C6CCF9D2-E5B8-C342-93FF-1C81A0A3570B}"/>
               </a:ext>
             </a:extLst>
           </p:cNvPr>
@@ -10611,7 +10469,7 @@
         </p:nvSpPr>
         <p:spPr>
           <a:xfrm>
-            <a:off x="1037685" y="332602"/>
+            <a:off x="1104167" y="274023"/>
             <a:ext cx="10210800" cy="505267"/>
           </a:xfrm>
           <a:prstGeom prst="rect">
@@ -10644,7 +10502,7 @@
           <p:cNvPr id="5" name="object 3">
             <a:extLst>
               <a:ext uri="{FF2B5EF4-FFF2-40B4-BE49-F238E27FC236}">
-                <a16:creationId xmlns:a16="http://schemas.microsoft.com/office/drawing/2014/main" id="{761ED89F-C38D-7F46-BB02-549F76E9E71A}"/>
+                <a16:creationId xmlns:a16="http://schemas.microsoft.com/office/drawing/2014/main" id="{CE53192C-00E1-E640-A78F-95673A425C1B}"/>
               </a:ext>
             </a:extLst>
           </p:cNvPr>
@@ -10653,8 +10511,8 @@
         </p:nvSpPr>
         <p:spPr>
           <a:xfrm>
-            <a:off x="1037686" y="1289526"/>
-            <a:ext cx="8561705" cy="259045"/>
+            <a:off x="1104169" y="1183439"/>
+            <a:ext cx="8561705" cy="505267"/>
           </a:xfrm>
           <a:prstGeom prst="rect">
             <a:avLst/>
@@ -10671,17 +10529,72 @@
               <a:rPr lang="en-US" sz="1600" dirty="0">
                 <a:latin typeface="+mj-lt"/>
               </a:rPr>
-              <a:t>If you want to specify the data type of a variable, this can be done with casting.</a:t>
+              <a:t>Single or Double Quotes? (Same as java)</a:t>
+            </a:r>
+          </a:p>
+          <a:p>
+            <a:pPr algn="l" fontAlgn="base"/>
+            <a:r>
+              <a:rPr lang="en-US" sz="1600" dirty="0">
+                <a:latin typeface="+mj-lt"/>
+              </a:rPr>
+              <a:t>String variables can be declared either by using single or double quotes:</a:t>
+            </a:r>
+          </a:p>
+        </p:txBody>
+      </p:sp>
+      <p:sp>
+        <p:nvSpPr>
+          <p:cNvPr id="6" name="object 3">
+            <a:extLst>
+              <a:ext uri="{FF2B5EF4-FFF2-40B4-BE49-F238E27FC236}">
+                <a16:creationId xmlns:a16="http://schemas.microsoft.com/office/drawing/2014/main" id="{63B3BB79-282D-3C4B-A8D3-8B2A8FB4C7CC}"/>
+              </a:ext>
+            </a:extLst>
+          </p:cNvPr>
+          <p:cNvSpPr txBox="1"/>
+          <p:nvPr/>
+        </p:nvSpPr>
+        <p:spPr>
+          <a:xfrm>
+            <a:off x="1104168" y="3722351"/>
+            <a:ext cx="8561705" cy="505267"/>
+          </a:xfrm>
+          <a:prstGeom prst="rect">
+            <a:avLst/>
+          </a:prstGeom>
+        </p:spPr>
+        <p:txBody>
+          <a:bodyPr vert="horz" wrap="square" lIns="0" tIns="12700" rIns="0" bIns="0" rtlCol="0">
+            <a:spAutoFit/>
+          </a:bodyPr>
+          <a:lstStyle/>
+          <a:p>
+            <a:pPr algn="l" fontAlgn="base"/>
+            <a:r>
+              <a:rPr lang="en-US" sz="1600" dirty="0">
+                <a:latin typeface="+mj-lt"/>
+              </a:rPr>
+              <a:t>Case-Sensitive (Same as java)</a:t>
+            </a:r>
+          </a:p>
+          <a:p>
+            <a:pPr algn="l" fontAlgn="base"/>
+            <a:r>
+              <a:rPr lang="en-US" sz="1600" dirty="0">
+                <a:latin typeface="+mj-lt"/>
+              </a:rPr>
+              <a:t>Variable names are case-sensitive.</a:t>
             </a:r>
           </a:p>
         </p:txBody>
       </p:sp>
       <p:pic>
         <p:nvPicPr>
-          <p:cNvPr id="6" name="תמונה 8">
+          <p:cNvPr id="7" name="תמונה 3">
             <a:extLst>
               <a:ext uri="{FF2B5EF4-FFF2-40B4-BE49-F238E27FC236}">
-                <a16:creationId xmlns:a16="http://schemas.microsoft.com/office/drawing/2014/main" id="{1101D368-777B-F44D-A87B-5210AB233101}"/>
+                <a16:creationId xmlns:a16="http://schemas.microsoft.com/office/drawing/2014/main" id="{1A7E0CD2-90C3-7445-8880-1FC05EBA7C8A}"/>
               </a:ext>
             </a:extLst>
           </p:cNvPr>
@@ -10698,66 +10611,20 @@
         </p:blipFill>
         <p:spPr>
           <a:xfrm>
-            <a:off x="1915219" y="1707523"/>
-            <a:ext cx="4380037" cy="1706663"/>
+            <a:off x="1104167" y="2006583"/>
+            <a:ext cx="6280205" cy="1311619"/>
           </a:xfrm>
           <a:prstGeom prst="rect">
             <a:avLst/>
           </a:prstGeom>
         </p:spPr>
       </p:pic>
-      <p:sp>
-        <p:nvSpPr>
-          <p:cNvPr id="7" name="object 3">
+      <p:pic>
+        <p:nvPicPr>
+          <p:cNvPr id="8" name="תמונה 6">
             <a:extLst>
               <a:ext uri="{FF2B5EF4-FFF2-40B4-BE49-F238E27FC236}">
-                <a16:creationId xmlns:a16="http://schemas.microsoft.com/office/drawing/2014/main" id="{90CB057C-953F-9D40-8526-240FA1012B3E}"/>
-              </a:ext>
-            </a:extLst>
-          </p:cNvPr>
-          <p:cNvSpPr txBox="1"/>
-          <p:nvPr/>
-        </p:nvSpPr>
-        <p:spPr>
-          <a:xfrm>
-            <a:off x="1037686" y="3724275"/>
-            <a:ext cx="8561705" cy="505267"/>
-          </a:xfrm>
-          <a:prstGeom prst="rect">
-            <a:avLst/>
-          </a:prstGeom>
-        </p:spPr>
-        <p:txBody>
-          <a:bodyPr vert="horz" wrap="square" lIns="0" tIns="12700" rIns="0" bIns="0" rtlCol="0">
-            <a:spAutoFit/>
-          </a:bodyPr>
-          <a:lstStyle/>
-          <a:p>
-            <a:pPr algn="l" fontAlgn="base"/>
-            <a:r>
-              <a:rPr lang="en-US" sz="1600" dirty="0">
-                <a:latin typeface="+mj-lt"/>
-              </a:rPr>
-              <a:t>Get the Type</a:t>
-            </a:r>
-          </a:p>
-          <a:p>
-            <a:pPr algn="l" fontAlgn="base"/>
-            <a:r>
-              <a:rPr lang="en-US" sz="1600" dirty="0">
-                <a:latin typeface="+mj-lt"/>
-              </a:rPr>
-              <a:t>You can get the data type of a variable with the type() function.</a:t>
-            </a:r>
-          </a:p>
-        </p:txBody>
-      </p:sp>
-      <p:pic>
-        <p:nvPicPr>
-          <p:cNvPr id="8" name="תמונה 13">
-            <a:extLst>
-              <a:ext uri="{FF2B5EF4-FFF2-40B4-BE49-F238E27FC236}">
-                <a16:creationId xmlns:a16="http://schemas.microsoft.com/office/drawing/2014/main" id="{7C89871F-4574-A448-8C3A-07238294BEBC}"/>
+                <a16:creationId xmlns:a16="http://schemas.microsoft.com/office/drawing/2014/main" id="{A49F6D65-C7F7-AB40-BCD4-976B5129A882}"/>
               </a:ext>
             </a:extLst>
           </p:cNvPr>
@@ -10774,8 +10641,8 @@
         </p:blipFill>
         <p:spPr>
           <a:xfrm>
-            <a:off x="1915219" y="4539634"/>
-            <a:ext cx="4430836" cy="1865615"/>
+            <a:off x="1104168" y="4631769"/>
+            <a:ext cx="3946643" cy="1785657"/>
           </a:xfrm>
           <a:prstGeom prst="rect">
             <a:avLst/>
@@ -10785,7 +10652,7 @@
     </p:spTree>
     <p:extLst>
       <p:ext uri="{BB962C8B-B14F-4D97-AF65-F5344CB8AC3E}">
-        <p14:creationId xmlns:p14="http://schemas.microsoft.com/office/powerpoint/2010/main" val="436353858"/>
+        <p14:creationId xmlns:p14="http://schemas.microsoft.com/office/powerpoint/2010/main" val="4207652682"/>
       </p:ext>
     </p:extLst>
   </p:cSld>
@@ -10814,10 +10681,45 @@
       </p:grpSpPr>
       <p:sp>
         <p:nvSpPr>
-          <p:cNvPr id="4" name="object 2">
+          <p:cNvPr id="2" name="object 2"/>
+          <p:cNvSpPr txBox="1"/>
+          <p:nvPr/>
+        </p:nvSpPr>
+        <p:spPr>
+          <a:xfrm>
+            <a:off x="659955" y="281923"/>
+            <a:ext cx="10210800" cy="505267"/>
+          </a:xfrm>
+          <a:prstGeom prst="rect">
+            <a:avLst/>
+          </a:prstGeom>
+        </p:spPr>
+        <p:txBody>
+          <a:bodyPr vert="horz" wrap="square" lIns="0" tIns="12700" rIns="0" bIns="0" rtlCol="0">
+            <a:spAutoFit/>
+          </a:bodyPr>
+          <a:lstStyle/>
+          <a:p>
+            <a:pPr marL="12700">
+              <a:spcBef>
+                <a:spcPts val="100"/>
+              </a:spcBef>
+            </a:pPr>
+            <a:r>
+              <a:rPr lang="en-US" sz="3200" dirty="0">
+                <a:cs typeface="Trebuchet MS"/>
+              </a:rPr>
+              <a:t>Python - Variable Names</a:t>
+            </a:r>
+          </a:p>
+        </p:txBody>
+      </p:sp>
+      <p:sp>
+        <p:nvSpPr>
+          <p:cNvPr id="6" name="object 3">
             <a:extLst>
               <a:ext uri="{FF2B5EF4-FFF2-40B4-BE49-F238E27FC236}">
-                <a16:creationId xmlns:a16="http://schemas.microsoft.com/office/drawing/2014/main" id="{C6CCF9D2-E5B8-C342-93FF-1C81A0A3570B}"/>
+                <a16:creationId xmlns:a16="http://schemas.microsoft.com/office/drawing/2014/main" id="{504C54EB-F689-45AF-9B50-A537385B0172}"/>
               </a:ext>
             </a:extLst>
           </p:cNvPr>
@@ -10826,8 +10728,8 @@
         </p:nvSpPr>
         <p:spPr>
           <a:xfrm>
-            <a:off x="1104167" y="274023"/>
-            <a:ext cx="10210800" cy="505267"/>
+            <a:off x="659957" y="2116080"/>
+            <a:ext cx="4227929" cy="2382704"/>
           </a:xfrm>
           <a:prstGeom prst="rect">
             <a:avLst/>
@@ -10839,119 +10741,72 @@
           </a:bodyPr>
           <a:lstStyle/>
           <a:p>
-            <a:pPr marL="12700">
-              <a:spcBef>
-                <a:spcPts val="100"/>
-              </a:spcBef>
-            </a:pPr>
-            <a:r>
-              <a:rPr lang="en-US" sz="3200" dirty="0">
-                <a:latin typeface="+mj-lt"/>
-                <a:cs typeface="Trebuchet MS"/>
-              </a:rPr>
-              <a:t>Python Variables</a:t>
-            </a:r>
-          </a:p>
-        </p:txBody>
-      </p:sp>
-      <p:sp>
-        <p:nvSpPr>
-          <p:cNvPr id="5" name="object 3">
+            <a:pPr algn="l" fontAlgn="base"/>
+            <a:r>
+              <a:rPr lang="en-US" sz="1400" dirty="0"/>
+              <a:t>A variable can have a short name (like x and y) or a more descriptive name (age, </a:t>
+            </a:r>
+            <a:r>
+              <a:rPr lang="en-US" sz="1400" dirty="0" err="1"/>
+              <a:t>carname</a:t>
+            </a:r>
+            <a:r>
+              <a:rPr lang="en-US" sz="1400" dirty="0"/>
+              <a:t>, </a:t>
+            </a:r>
+            <a:r>
+              <a:rPr lang="en-US" sz="1400" dirty="0" err="1"/>
+              <a:t>total_volume</a:t>
+            </a:r>
+            <a:r>
+              <a:rPr lang="en-US" sz="1400" dirty="0"/>
+              <a:t>). </a:t>
+            </a:r>
+            <a:endParaRPr lang="he-IL" sz="1400" dirty="0"/>
+          </a:p>
+          <a:p>
+            <a:pPr algn="l" fontAlgn="base"/>
+            <a:r>
+              <a:rPr lang="en-US" sz="1400" dirty="0"/>
+              <a:t>Rules for Python variables:</a:t>
+            </a:r>
+          </a:p>
+          <a:p>
+            <a:pPr algn="l" fontAlgn="base"/>
+            <a:r>
+              <a:rPr lang="en-US" sz="1400" dirty="0"/>
+              <a:t>A variable name must start with a letter or the underscore character</a:t>
+            </a:r>
+          </a:p>
+          <a:p>
+            <a:pPr algn="l" fontAlgn="base"/>
+            <a:r>
+              <a:rPr lang="en-US" sz="1400" dirty="0"/>
+              <a:t>A variable name cannot start with a number</a:t>
+            </a:r>
+          </a:p>
+          <a:p>
+            <a:pPr algn="l" fontAlgn="base"/>
+            <a:r>
+              <a:rPr lang="en-US" sz="1400" dirty="0"/>
+              <a:t>A variable name can only contain alpha-numeric characters and underscores (A-z, 0-9, and _ )</a:t>
+            </a:r>
+          </a:p>
+          <a:p>
+            <a:pPr algn="l" fontAlgn="base"/>
+            <a:r>
+              <a:rPr lang="en-US" sz="1400" dirty="0"/>
+              <a:t>Variable names are case-sensitive (age, Age and AGE are three different variables)</a:t>
+            </a:r>
+          </a:p>
+        </p:txBody>
+      </p:sp>
+      <p:pic>
+        <p:nvPicPr>
+          <p:cNvPr id="5" name="תמונה 4">
             <a:extLst>
               <a:ext uri="{FF2B5EF4-FFF2-40B4-BE49-F238E27FC236}">
-                <a16:creationId xmlns:a16="http://schemas.microsoft.com/office/drawing/2014/main" id="{CE53192C-00E1-E640-A78F-95673A425C1B}"/>
-              </a:ext>
-            </a:extLst>
-          </p:cNvPr>
-          <p:cNvSpPr txBox="1"/>
-          <p:nvPr/>
-        </p:nvSpPr>
-        <p:spPr>
-          <a:xfrm>
-            <a:off x="1104169" y="1183439"/>
-            <a:ext cx="8561705" cy="505267"/>
-          </a:xfrm>
-          <a:prstGeom prst="rect">
-            <a:avLst/>
-          </a:prstGeom>
-        </p:spPr>
-        <p:txBody>
-          <a:bodyPr vert="horz" wrap="square" lIns="0" tIns="12700" rIns="0" bIns="0" rtlCol="0">
-            <a:spAutoFit/>
-          </a:bodyPr>
-          <a:lstStyle/>
-          <a:p>
-            <a:pPr algn="l" fontAlgn="base"/>
-            <a:r>
-              <a:rPr lang="en-US" sz="1600" dirty="0">
-                <a:latin typeface="+mj-lt"/>
-              </a:rPr>
-              <a:t>Single or Double Quotes? (Same as java)</a:t>
-            </a:r>
-          </a:p>
-          <a:p>
-            <a:pPr algn="l" fontAlgn="base"/>
-            <a:r>
-              <a:rPr lang="en-US" sz="1600" dirty="0">
-                <a:latin typeface="+mj-lt"/>
-              </a:rPr>
-              <a:t>String variables can be declared either by using single or double quotes:</a:t>
-            </a:r>
-          </a:p>
-        </p:txBody>
-      </p:sp>
-      <p:sp>
-        <p:nvSpPr>
-          <p:cNvPr id="6" name="object 3">
-            <a:extLst>
-              <a:ext uri="{FF2B5EF4-FFF2-40B4-BE49-F238E27FC236}">
-                <a16:creationId xmlns:a16="http://schemas.microsoft.com/office/drawing/2014/main" id="{63B3BB79-282D-3C4B-A8D3-8B2A8FB4C7CC}"/>
-              </a:ext>
-            </a:extLst>
-          </p:cNvPr>
-          <p:cNvSpPr txBox="1"/>
-          <p:nvPr/>
-        </p:nvSpPr>
-        <p:spPr>
-          <a:xfrm>
-            <a:off x="1104168" y="3722351"/>
-            <a:ext cx="8561705" cy="505267"/>
-          </a:xfrm>
-          <a:prstGeom prst="rect">
-            <a:avLst/>
-          </a:prstGeom>
-        </p:spPr>
-        <p:txBody>
-          <a:bodyPr vert="horz" wrap="square" lIns="0" tIns="12700" rIns="0" bIns="0" rtlCol="0">
-            <a:spAutoFit/>
-          </a:bodyPr>
-          <a:lstStyle/>
-          <a:p>
-            <a:pPr algn="l" fontAlgn="base"/>
-            <a:r>
-              <a:rPr lang="en-US" sz="1600" dirty="0">
-                <a:latin typeface="+mj-lt"/>
-              </a:rPr>
-              <a:t>Case-Sensitive (Same as java)</a:t>
-            </a:r>
-          </a:p>
-          <a:p>
-            <a:pPr algn="l" fontAlgn="base"/>
-            <a:r>
-              <a:rPr lang="en-US" sz="1600" dirty="0">
-                <a:latin typeface="+mj-lt"/>
-              </a:rPr>
-              <a:t>Variable names are case-sensitive.</a:t>
-            </a:r>
-          </a:p>
-        </p:txBody>
-      </p:sp>
-      <p:pic>
-        <p:nvPicPr>
-          <p:cNvPr id="7" name="תמונה 3">
-            <a:extLst>
-              <a:ext uri="{FF2B5EF4-FFF2-40B4-BE49-F238E27FC236}">
-                <a16:creationId xmlns:a16="http://schemas.microsoft.com/office/drawing/2014/main" id="{1A7E0CD2-90C3-7445-8880-1FC05EBA7C8A}"/>
+                <a16:creationId xmlns:a16="http://schemas.microsoft.com/office/drawing/2014/main" id="{1502D7FD-19C8-407E-8C19-721D6A81C5D5}"/>
               </a:ext>
             </a:extLst>
           </p:cNvPr>
@@ -10968,38 +10823,8 @@
         </p:blipFill>
         <p:spPr>
           <a:xfrm>
-            <a:off x="1104167" y="2006583"/>
-            <a:ext cx="6280205" cy="1311619"/>
-          </a:xfrm>
-          <a:prstGeom prst="rect">
-            <a:avLst/>
-          </a:prstGeom>
-        </p:spPr>
-      </p:pic>
-      <p:pic>
-        <p:nvPicPr>
-          <p:cNvPr id="8" name="תמונה 6">
-            <a:extLst>
-              <a:ext uri="{FF2B5EF4-FFF2-40B4-BE49-F238E27FC236}">
-                <a16:creationId xmlns:a16="http://schemas.microsoft.com/office/drawing/2014/main" id="{A49F6D65-C7F7-AB40-BCD4-976B5129A882}"/>
-              </a:ext>
-            </a:extLst>
-          </p:cNvPr>
-          <p:cNvPicPr>
-            <a:picLocks noChangeAspect="1"/>
-          </p:cNvPicPr>
-          <p:nvPr/>
-        </p:nvPicPr>
-        <p:blipFill>
-          <a:blip r:embed="rId3"/>
-          <a:stretch>
-            <a:fillRect/>
-          </a:stretch>
-        </p:blipFill>
-        <p:spPr>
-          <a:xfrm>
-            <a:off x="1104168" y="4631769"/>
-            <a:ext cx="3946643" cy="1785657"/>
+            <a:off x="5047211" y="1114869"/>
+            <a:ext cx="6858000" cy="4600575"/>
           </a:xfrm>
           <a:prstGeom prst="rect">
             <a:avLst/>
@@ -11009,7 +10834,7 @@
     </p:spTree>
     <p:extLst>
       <p:ext uri="{BB962C8B-B14F-4D97-AF65-F5344CB8AC3E}">
-        <p14:creationId xmlns:p14="http://schemas.microsoft.com/office/powerpoint/2010/main" val="4207652682"/>
+        <p14:creationId xmlns:p14="http://schemas.microsoft.com/office/powerpoint/2010/main" val="355716663"/>
       </p:ext>
     </p:extLst>
   </p:cSld>
@@ -11044,7 +10869,7 @@
         </p:nvSpPr>
         <p:spPr>
           <a:xfrm>
-            <a:off x="659955" y="281923"/>
+            <a:off x="647575" y="366698"/>
             <a:ext cx="10210800" cy="505267"/>
           </a:xfrm>
           <a:prstGeom prst="rect">
@@ -11063,11 +10888,30 @@
               </a:spcBef>
             </a:pPr>
             <a:r>
-              <a:rPr lang="en-US" sz="3200" dirty="0">
+              <a:rPr lang="fr-FR" sz="3200" dirty="0">
+                <a:latin typeface="Trebuchet MS"/>
                 <a:cs typeface="Trebuchet MS"/>
               </a:rPr>
-              <a:t>Python - Variable Names</a:t>
-            </a:r>
+              <a:t>Python Variables - </a:t>
+            </a:r>
+            <a:r>
+              <a:rPr lang="fr-FR" sz="3200" dirty="0" err="1">
+                <a:latin typeface="Trebuchet MS"/>
+                <a:cs typeface="Trebuchet MS"/>
+              </a:rPr>
+              <a:t>Assign</a:t>
+            </a:r>
+            <a:r>
+              <a:rPr lang="fr-FR" sz="3200" dirty="0">
+                <a:latin typeface="Trebuchet MS"/>
+                <a:cs typeface="Trebuchet MS"/>
+              </a:rPr>
+              <a:t> Multiple Values</a:t>
+            </a:r>
+            <a:endParaRPr lang="en-US" sz="3200" dirty="0">
+              <a:latin typeface="Trebuchet MS"/>
+              <a:cs typeface="Trebuchet MS"/>
+            </a:endParaRPr>
           </a:p>
         </p:txBody>
       </p:sp>
@@ -11085,8 +10929,8 @@
         </p:nvSpPr>
         <p:spPr>
           <a:xfrm>
-            <a:off x="659957" y="2116080"/>
-            <a:ext cx="4227929" cy="2382704"/>
+            <a:off x="828625" y="1045837"/>
+            <a:ext cx="8561705" cy="443711"/>
           </a:xfrm>
           <a:prstGeom prst="rect">
             <a:avLst/>
@@ -11101,69 +10945,108 @@
             <a:pPr algn="l" fontAlgn="base"/>
             <a:r>
               <a:rPr lang="en-US" sz="1400" dirty="0"/>
-              <a:t>A variable can have a short name (like x and y) or a more descriptive name (age, </a:t>
-            </a:r>
-            <a:r>
-              <a:rPr lang="en-US" sz="1400" dirty="0" err="1"/>
-              <a:t>carname</a:t>
-            </a:r>
+              <a:t>Many Values to Multiple Variables</a:t>
+            </a:r>
+          </a:p>
+          <a:p>
+            <a:pPr algn="l" fontAlgn="base"/>
             <a:r>
               <a:rPr lang="en-US" sz="1400" dirty="0"/>
-              <a:t>, </a:t>
-            </a:r>
-            <a:r>
-              <a:rPr lang="en-US" sz="1400" dirty="0" err="1"/>
-              <a:t>total_volume</a:t>
-            </a:r>
+              <a:t>Python allows you to assign values to multiple variables in one line:</a:t>
+            </a:r>
+          </a:p>
+        </p:txBody>
+      </p:sp>
+      <p:sp>
+        <p:nvSpPr>
+          <p:cNvPr id="7" name="object 3">
+            <a:extLst>
+              <a:ext uri="{FF2B5EF4-FFF2-40B4-BE49-F238E27FC236}">
+                <a16:creationId xmlns:a16="http://schemas.microsoft.com/office/drawing/2014/main" id="{334405EB-ED1B-4B81-8CB4-CBBC6E8D925D}"/>
+              </a:ext>
+            </a:extLst>
+          </p:cNvPr>
+          <p:cNvSpPr txBox="1"/>
+          <p:nvPr/>
+        </p:nvSpPr>
+        <p:spPr>
+          <a:xfrm>
+            <a:off x="828626" y="2789078"/>
+            <a:ext cx="8561705" cy="443711"/>
+          </a:xfrm>
+          <a:prstGeom prst="rect">
+            <a:avLst/>
+          </a:prstGeom>
+        </p:spPr>
+        <p:txBody>
+          <a:bodyPr vert="horz" wrap="square" lIns="0" tIns="12700" rIns="0" bIns="0" rtlCol="0">
+            <a:spAutoFit/>
+          </a:bodyPr>
+          <a:lstStyle/>
+          <a:p>
+            <a:pPr algn="l" fontAlgn="base"/>
             <a:r>
               <a:rPr lang="en-US" sz="1400" dirty="0"/>
-              <a:t>). </a:t>
-            </a:r>
-            <a:endParaRPr lang="he-IL" sz="1400" dirty="0"/>
+              <a:t>One Value to Multiple Variables</a:t>
+            </a:r>
           </a:p>
           <a:p>
             <a:pPr algn="l" fontAlgn="base"/>
             <a:r>
               <a:rPr lang="en-US" sz="1400" dirty="0"/>
-              <a:t>Rules for Python variables:</a:t>
-            </a:r>
-          </a:p>
+              <a:t>And you can assign the same value to multiple variables in one line:</a:t>
+            </a:r>
+          </a:p>
+        </p:txBody>
+      </p:sp>
+      <p:sp>
+        <p:nvSpPr>
+          <p:cNvPr id="8" name="object 3">
+            <a:extLst>
+              <a:ext uri="{FF2B5EF4-FFF2-40B4-BE49-F238E27FC236}">
+                <a16:creationId xmlns:a16="http://schemas.microsoft.com/office/drawing/2014/main" id="{BAB998D1-0355-4374-BE6C-58AB9395D3F0}"/>
+              </a:ext>
+            </a:extLst>
+          </p:cNvPr>
+          <p:cNvSpPr txBox="1"/>
+          <p:nvPr/>
+        </p:nvSpPr>
+        <p:spPr>
+          <a:xfrm>
+            <a:off x="828625" y="4674846"/>
+            <a:ext cx="8561705" cy="659155"/>
+          </a:xfrm>
+          <a:prstGeom prst="rect">
+            <a:avLst/>
+          </a:prstGeom>
+        </p:spPr>
+        <p:txBody>
+          <a:bodyPr vert="horz" wrap="square" lIns="0" tIns="12700" rIns="0" bIns="0" rtlCol="0">
+            <a:spAutoFit/>
+          </a:bodyPr>
+          <a:lstStyle/>
           <a:p>
             <a:pPr algn="l" fontAlgn="base"/>
             <a:r>
               <a:rPr lang="en-US" sz="1400" dirty="0"/>
-              <a:t>A variable name must start with a letter or the underscore character</a:t>
+              <a:t>Unpack a Collection</a:t>
             </a:r>
           </a:p>
           <a:p>
             <a:pPr algn="l" fontAlgn="base"/>
             <a:r>
               <a:rPr lang="en-US" sz="1400" dirty="0"/>
-              <a:t>A variable name cannot start with a number</a:t>
-            </a:r>
-          </a:p>
-          <a:p>
-            <a:pPr algn="l" fontAlgn="base"/>
-            <a:r>
-              <a:rPr lang="en-US" sz="1400" dirty="0"/>
-              <a:t>A variable name can only contain alpha-numeric characters and underscores (A-z, 0-9, and _ )</a:t>
-            </a:r>
-          </a:p>
-          <a:p>
-            <a:pPr algn="l" fontAlgn="base"/>
-            <a:r>
-              <a:rPr lang="en-US" sz="1400" dirty="0"/>
-              <a:t>Variable names are case-sensitive (age, Age and AGE are three different variables)</a:t>
+              <a:t>If you have a collection of values in a list, tuple etc. Python allows you extract the values into variables. This is called unpacking.</a:t>
             </a:r>
           </a:p>
         </p:txBody>
       </p:sp>
       <p:pic>
         <p:nvPicPr>
-          <p:cNvPr id="5" name="תמונה 4">
+          <p:cNvPr id="4" name="תמונה 3">
             <a:extLst>
               <a:ext uri="{FF2B5EF4-FFF2-40B4-BE49-F238E27FC236}">
-                <a16:creationId xmlns:a16="http://schemas.microsoft.com/office/drawing/2014/main" id="{1502D7FD-19C8-407E-8C19-721D6A81C5D5}"/>
+                <a16:creationId xmlns:a16="http://schemas.microsoft.com/office/drawing/2014/main" id="{4BCE7B6E-07DE-47F4-B6BC-8E5625338D6E}"/>
               </a:ext>
             </a:extLst>
           </p:cNvPr>
@@ -11172,16 +11055,73 @@
           </p:cNvPicPr>
           <p:nvPr/>
         </p:nvPicPr>
-        <p:blipFill>
+        <p:blipFill rotWithShape="1">
           <a:blip r:embed="rId2"/>
-          <a:stretch>
-            <a:fillRect/>
-          </a:stretch>
+          <a:srcRect b="50006"/>
+          <a:stretch/>
         </p:blipFill>
         <p:spPr>
           <a:xfrm>
-            <a:off x="5047211" y="1114869"/>
-            <a:ext cx="6858000" cy="4600575"/>
+            <a:off x="828626" y="1765201"/>
+            <a:ext cx="3781425" cy="690488"/>
+          </a:xfrm>
+          <a:prstGeom prst="rect">
+            <a:avLst/>
+          </a:prstGeom>
+        </p:spPr>
+      </p:pic>
+      <p:pic>
+        <p:nvPicPr>
+          <p:cNvPr id="10" name="תמונה 9">
+            <a:extLst>
+              <a:ext uri="{FF2B5EF4-FFF2-40B4-BE49-F238E27FC236}">
+                <a16:creationId xmlns:a16="http://schemas.microsoft.com/office/drawing/2014/main" id="{E392D451-5E10-4932-880F-1D24DDCC0A04}"/>
+              </a:ext>
+            </a:extLst>
+          </p:cNvPr>
+          <p:cNvPicPr>
+            <a:picLocks noChangeAspect="1"/>
+          </p:cNvPicPr>
+          <p:nvPr/>
+        </p:nvPicPr>
+        <p:blipFill rotWithShape="1">
+          <a:blip r:embed="rId3"/>
+          <a:srcRect b="53241"/>
+          <a:stretch/>
+        </p:blipFill>
+        <p:spPr>
+          <a:xfrm>
+            <a:off x="828625" y="3456408"/>
+            <a:ext cx="5629275" cy="659155"/>
+          </a:xfrm>
+          <a:prstGeom prst="rect">
+            <a:avLst/>
+          </a:prstGeom>
+        </p:spPr>
+      </p:pic>
+      <p:pic>
+        <p:nvPicPr>
+          <p:cNvPr id="12" name="תמונה 11">
+            <a:extLst>
+              <a:ext uri="{FF2B5EF4-FFF2-40B4-BE49-F238E27FC236}">
+                <a16:creationId xmlns:a16="http://schemas.microsoft.com/office/drawing/2014/main" id="{D8F5F94C-5992-426F-9ED3-5705A2824A95}"/>
+              </a:ext>
+            </a:extLst>
+          </p:cNvPr>
+          <p:cNvPicPr>
+            <a:picLocks noChangeAspect="1"/>
+          </p:cNvPicPr>
+          <p:nvPr/>
+        </p:nvPicPr>
+        <p:blipFill rotWithShape="1">
+          <a:blip r:embed="rId4"/>
+          <a:srcRect b="34756"/>
+          <a:stretch/>
+        </p:blipFill>
+        <p:spPr>
+          <a:xfrm>
+            <a:off x="828623" y="5451944"/>
+            <a:ext cx="3733800" cy="1211821"/>
           </a:xfrm>
           <a:prstGeom prst="rect">
             <a:avLst/>
@@ -11191,7 +11131,7 @@
     </p:spTree>
     <p:extLst>
       <p:ext uri="{BB962C8B-B14F-4D97-AF65-F5344CB8AC3E}">
-        <p14:creationId xmlns:p14="http://schemas.microsoft.com/office/powerpoint/2010/main" val="355716663"/>
+        <p14:creationId xmlns:p14="http://schemas.microsoft.com/office/powerpoint/2010/main" val="613200342"/>
       </p:ext>
     </p:extLst>
   </p:cSld>
@@ -11646,18 +11586,18 @@
 </file>
 
 <file path=customXml/item2.xml><?xml version="1.0" encoding="utf-8"?>
+<p:properties xmlns:p="http://schemas.microsoft.com/office/2006/metadata/properties" xmlns:xsi="http://www.w3.org/2001/XMLSchema-instance" xmlns:pc="http://schemas.microsoft.com/office/infopath/2007/PartnerControls">
+  <documentManagement/>
+</p:properties>
+</file>
+
+<file path=customXml/item3.xml><?xml version="1.0" encoding="utf-8"?>
 <?mso-contentType ?>
 <FormTemplates xmlns="http://schemas.microsoft.com/sharepoint/v3/contenttype/forms">
   <Display>DocumentLibraryForm</Display>
   <Edit>DocumentLibraryForm</Edit>
   <New>DocumentLibraryForm</New>
 </FormTemplates>
-</file>
-
-<file path=customXml/item3.xml><?xml version="1.0" encoding="utf-8"?>
-<p:properties xmlns:p="http://schemas.microsoft.com/office/2006/metadata/properties" xmlns:xsi="http://www.w3.org/2001/XMLSchema-instance" xmlns:pc="http://schemas.microsoft.com/office/infopath/2007/PartnerControls">
-  <documentManagement/>
-</p:properties>
 </file>
 
 <file path=customXml/itemProps1.xml><?xml version="1.0" encoding="utf-8"?>
@@ -11679,14 +11619,6 @@
 </file>
 
 <file path=customXml/itemProps2.xml><?xml version="1.0" encoding="utf-8"?>
-<ds:datastoreItem xmlns:ds="http://schemas.openxmlformats.org/officeDocument/2006/customXml" ds:itemID="{8FA54268-37D0-41C9-9AD9-DAF5145085C1}">
-  <ds:schemaRefs>
-    <ds:schemaRef ds:uri="http://schemas.microsoft.com/sharepoint/v3/contenttype/forms"/>
-  </ds:schemaRefs>
-</ds:datastoreItem>
-</file>
-
-<file path=customXml/itemProps3.xml><?xml version="1.0" encoding="utf-8"?>
 <ds:datastoreItem xmlns:ds="http://schemas.openxmlformats.org/officeDocument/2006/customXml" ds:itemID="{4B3AC231-7E23-44F0-881F-22B96886341D}">
   <ds:schemaRefs>
     <ds:schemaRef ds:uri="http://www.w3.org/XML/1998/namespace"/>
@@ -11700,4 +11632,12 @@
     <ds:schemaRef ds:uri="http://purl.org/dc/terms/"/>
   </ds:schemaRefs>
 </ds:datastoreItem>
+</file>
+
+<file path=customXml/itemProps3.xml><?xml version="1.0" encoding="utf-8"?>
+<ds:datastoreItem xmlns:ds="http://schemas.openxmlformats.org/officeDocument/2006/customXml" ds:itemID="{8FA54268-37D0-41C9-9AD9-DAF5145085C1}">
+  <ds:schemaRefs>
+    <ds:schemaRef ds:uri="http://schemas.microsoft.com/sharepoint/v3/contenttype/forms"/>
+  </ds:schemaRefs>
+</ds:datastoreItem>
 </file>